--- a/Loss_Run_Process_Understanding_and_Proposal.pptx
+++ b/Loss_Run_Process_Understanding_and_Proposal.pptx
@@ -3093,7 +3093,7 @@
     <p:bg>
       <p:bgPr>
         <a:solidFill>
-          <a:srgbClr val="FF4B0A"/>
+          <a:srgbClr val="FFFFFF"/>
         </a:solidFill>
         <a:effectLst/>
       </p:bgPr>
@@ -3107,130 +3107,23 @@
       <p:grpSpPr/>
       <p:sp>
         <p:nvSpPr>
-          <p:cNvPr id="2" name="TextBox 1"/>
-          <p:cNvSpPr txBox="1"/>
-          <p:nvPr/>
-        </p:nvSpPr>
-        <p:spPr>
-          <a:xfrm>
-            <a:off x="685800" y="566928"/>
-            <a:ext cx="4114800" cy="274320"/>
-          </a:xfrm>
-          <a:prstGeom prst="rect">
-            <a:avLst/>
-          </a:prstGeom>
-          <a:noFill/>
-        </p:spPr>
-        <p:txBody>
-          <a:bodyPr wrap="none" lIns="25400" rIns="25400" tIns="12700" bIns="12700" anchor="t">
-            <a:spAutoFit/>
-          </a:bodyPr>
-          <a:lstStyle/>
-          <a:p>
-            <a:pPr algn="l"/>
-            <a:r>
-              <a:rPr sz="1100" b="1">
-                <a:solidFill>
-                  <a:srgbClr val="FFFFFF"/>
-                </a:solidFill>
-                <a:latin typeface="Aptos"/>
-              </a:rPr>
-              <a:t>SPECIAL ACCOUNTS</a:t>
-            </a:r>
-          </a:p>
-        </p:txBody>
-      </p:sp>
-      <p:sp>
-        <p:nvSpPr>
-          <p:cNvPr id="3" name="TextBox 2"/>
-          <p:cNvSpPr txBox="1"/>
-          <p:nvPr/>
-        </p:nvSpPr>
-        <p:spPr>
-          <a:xfrm>
-            <a:off x="685800" y="1207008"/>
-            <a:ext cx="7955279" cy="640080"/>
-          </a:xfrm>
-          <a:prstGeom prst="rect">
-            <a:avLst/>
-          </a:prstGeom>
-          <a:noFill/>
-        </p:spPr>
-        <p:txBody>
-          <a:bodyPr wrap="none" lIns="25400" rIns="25400" tIns="12700" bIns="12700" anchor="t">
-            <a:spAutoFit/>
-          </a:bodyPr>
-          <a:lstStyle/>
-          <a:p>
-            <a:pPr algn="l"/>
-            <a:r>
-              <a:rPr sz="3400" b="1">
-                <a:solidFill>
-                  <a:srgbClr val="FFFFFF"/>
-                </a:solidFill>
-                <a:latin typeface="Aptos"/>
-              </a:rPr>
-              <a:t>Loss Run Generation</a:t>
-            </a:r>
-          </a:p>
-        </p:txBody>
-      </p:sp>
-      <p:sp>
-        <p:nvSpPr>
-          <p:cNvPr id="4" name="TextBox 3"/>
-          <p:cNvSpPr txBox="1"/>
-          <p:nvPr/>
-        </p:nvSpPr>
-        <p:spPr>
-          <a:xfrm>
-            <a:off x="685800" y="1938528"/>
-            <a:ext cx="8961120" cy="502920"/>
-          </a:xfrm>
-          <a:prstGeom prst="rect">
-            <a:avLst/>
-          </a:prstGeom>
-          <a:noFill/>
-        </p:spPr>
-        <p:txBody>
-          <a:bodyPr wrap="none" lIns="25400" rIns="25400" tIns="12700" bIns="12700" anchor="t">
-            <a:spAutoFit/>
-          </a:bodyPr>
-          <a:lstStyle/>
-          <a:p>
-            <a:pPr algn="l"/>
-            <a:r>
-              <a:rPr sz="2000" b="0">
-                <a:solidFill>
-                  <a:srgbClr val="DAE4EF"/>
-                </a:solidFill>
-                <a:latin typeface="Aptos"/>
-              </a:rPr>
-              <a:t>Current-state understanding and application integration proposal</a:t>
-            </a:r>
-          </a:p>
-        </p:txBody>
-      </p:sp>
-      <p:sp>
-        <p:nvSpPr>
-          <p:cNvPr id="5" name="Rounded Rectangle 4"/>
+          <p:cNvPr id="2" name="Rectangle 1"/>
           <p:cNvSpPr/>
           <p:nvPr/>
         </p:nvSpPr>
         <p:spPr>
           <a:xfrm>
-            <a:off x="713232" y="2880360"/>
-            <a:ext cx="2057400" cy="438912"/>
-          </a:xfrm>
-          <a:prstGeom prst="roundRect">
+            <a:off x="0" y="0"/>
+            <a:ext cx="237744" cy="6858000"/>
+          </a:xfrm>
+          <a:prstGeom prst="rect">
             <a:avLst/>
           </a:prstGeom>
           <a:solidFill>
-            <a:srgbClr val="2F2F2F"/>
+            <a:srgbClr val="FF4B0A"/>
           </a:solidFill>
-          <a:ln w="15240">
-            <a:solidFill>
-              <a:srgbClr val="2F2F2F"/>
-            </a:solidFill>
+          <a:ln>
+            <a:noFill/>
           </a:ln>
         </p:spPr>
         <p:style>
@@ -3248,78 +3141,32 @@
           </a:fontRef>
         </p:style>
         <p:txBody>
-          <a:bodyPr rtlCol="0" anchor="ctr" lIns="109728" rIns="109728"/>
+          <a:bodyPr rtlCol="0" anchor="ctr"/>
           <a:lstStyle/>
           <a:p>
             <a:pPr algn="ctr"/>
-            <a:r>
-              <a:rPr sz="1100" b="1">
-                <a:solidFill>
-                  <a:srgbClr val="FFFFFF"/>
-                </a:solidFill>
-                <a:latin typeface="Aptos"/>
-              </a:rPr>
-              <a:t>DISCOVERY SUMMARY</a:t>
-            </a:r>
-          </a:p>
-        </p:txBody>
-      </p:sp>
-      <p:sp>
-        <p:nvSpPr>
-          <p:cNvPr id="6" name="TextBox 5"/>
-          <p:cNvSpPr txBox="1"/>
-          <p:nvPr/>
-        </p:nvSpPr>
-        <p:spPr>
-          <a:xfrm>
-            <a:off x="731520" y="3611880"/>
-            <a:ext cx="9601200" cy="457200"/>
-          </a:xfrm>
-          <a:prstGeom prst="rect">
-            <a:avLst/>
-          </a:prstGeom>
-          <a:noFill/>
-        </p:spPr>
-        <p:txBody>
-          <a:bodyPr wrap="none" lIns="25400" rIns="25400" tIns="12700" bIns="12700" anchor="t">
-            <a:spAutoFit/>
-          </a:bodyPr>
-          <a:lstStyle/>
-          <a:p>
-            <a:pPr algn="l"/>
-            <a:r>
-              <a:rPr sz="1600" b="0">
-                <a:solidFill>
-                  <a:srgbClr val="FFFFFF"/>
-                </a:solidFill>
-                <a:latin typeface="Aptos"/>
-              </a:rPr>
-              <a:t>What happens today  •  What can be reused  •  What a future user flow could look like</a:t>
-            </a:r>
-          </a:p>
-        </p:txBody>
-      </p:sp>
-      <p:sp>
-        <p:nvSpPr>
-          <p:cNvPr id="7" name="Rounded Rectangle 6"/>
+          </a:p>
+        </p:txBody>
+      </p:sp>
+      <p:sp>
+        <p:nvSpPr>
+          <p:cNvPr id="3" name="Rectangle 2"/>
           <p:cNvSpPr/>
           <p:nvPr/>
         </p:nvSpPr>
         <p:spPr>
           <a:xfrm>
-            <a:off x="731520" y="4709160"/>
-            <a:ext cx="1600200" cy="566928"/>
-          </a:xfrm>
-          <a:prstGeom prst="roundRect">
+            <a:off x="9784080" y="0"/>
+            <a:ext cx="2404872" cy="310896"/>
+          </a:xfrm>
+          <a:prstGeom prst="rect">
             <a:avLst/>
           </a:prstGeom>
           <a:solidFill>
-            <a:srgbClr val="2F2F2F"/>
+            <a:srgbClr val="FF4B0A"/>
           </a:solidFill>
-          <a:ln w="15240">
-            <a:solidFill>
-              <a:srgbClr val="2F2F2F"/>
-            </a:solidFill>
+          <a:ln>
+            <a:noFill/>
           </a:ln>
         </p:spPr>
         <p:style>
@@ -3337,43 +3184,137 @@
           </a:fontRef>
         </p:style>
         <p:txBody>
-          <a:bodyPr rtlCol="0" anchor="ctr" lIns="109728" rIns="109728"/>
+          <a:bodyPr rtlCol="0" anchor="ctr"/>
           <a:lstStyle/>
           <a:p>
             <a:pPr algn="ctr"/>
-            <a:r>
-              <a:rPr sz="1200" b="1">
-                <a:solidFill>
-                  <a:srgbClr val="FFFFFF"/>
-                </a:solidFill>
-                <a:latin typeface="Aptos"/>
-              </a:rPr>
-              <a:t>DATA</a:t>
-            </a:r>
-          </a:p>
-        </p:txBody>
-      </p:sp>
-      <p:sp>
-        <p:nvSpPr>
-          <p:cNvPr id="8" name="Rounded Rectangle 7"/>
+          </a:p>
+        </p:txBody>
+      </p:sp>
+      <p:sp>
+        <p:nvSpPr>
+          <p:cNvPr id="4" name="TextBox 3"/>
+          <p:cNvSpPr txBox="1"/>
+          <p:nvPr/>
+        </p:nvSpPr>
+        <p:spPr>
+          <a:xfrm>
+            <a:off x="749808" y="658368"/>
+            <a:ext cx="4114800" cy="274320"/>
+          </a:xfrm>
+          <a:prstGeom prst="rect">
+            <a:avLst/>
+          </a:prstGeom>
+          <a:noFill/>
+        </p:spPr>
+        <p:txBody>
+          <a:bodyPr wrap="none" lIns="25400" rIns="25400" tIns="12700" bIns="12700" anchor="t">
+            <a:spAutoFit/>
+          </a:bodyPr>
+          <a:lstStyle/>
+          <a:p>
+            <a:pPr algn="l"/>
+            <a:r>
+              <a:rPr sz="1100" b="1">
+                <a:solidFill>
+                  <a:srgbClr val="FF4B0A"/>
+                </a:solidFill>
+                <a:latin typeface="Aptos"/>
+              </a:rPr>
+              <a:t>SPECIAL ACCOUNTS</a:t>
+            </a:r>
+          </a:p>
+        </p:txBody>
+      </p:sp>
+      <p:sp>
+        <p:nvSpPr>
+          <p:cNvPr id="5" name="TextBox 4"/>
+          <p:cNvSpPr txBox="1"/>
+          <p:nvPr/>
+        </p:nvSpPr>
+        <p:spPr>
+          <a:xfrm>
+            <a:off x="749808" y="1353312"/>
+            <a:ext cx="8961120" cy="658368"/>
+          </a:xfrm>
+          <a:prstGeom prst="rect">
+            <a:avLst/>
+          </a:prstGeom>
+          <a:noFill/>
+        </p:spPr>
+        <p:txBody>
+          <a:bodyPr wrap="none" lIns="25400" rIns="25400" tIns="12700" bIns="12700" anchor="t">
+            <a:spAutoFit/>
+          </a:bodyPr>
+          <a:lstStyle/>
+          <a:p>
+            <a:pPr algn="l"/>
+            <a:r>
+              <a:rPr sz="3600" b="1">
+                <a:solidFill>
+                  <a:srgbClr val="2F2F2F"/>
+                </a:solidFill>
+                <a:latin typeface="Aptos"/>
+              </a:rPr>
+              <a:t>Loss Run Generation</a:t>
+            </a:r>
+          </a:p>
+        </p:txBody>
+      </p:sp>
+      <p:sp>
+        <p:nvSpPr>
+          <p:cNvPr id="6" name="TextBox 5"/>
+          <p:cNvSpPr txBox="1"/>
+          <p:nvPr/>
+        </p:nvSpPr>
+        <p:spPr>
+          <a:xfrm>
+            <a:off x="749808" y="2148840"/>
+            <a:ext cx="9875520" cy="502920"/>
+          </a:xfrm>
+          <a:prstGeom prst="rect">
+            <a:avLst/>
+          </a:prstGeom>
+          <a:noFill/>
+        </p:spPr>
+        <p:txBody>
+          <a:bodyPr wrap="none" lIns="25400" rIns="25400" tIns="12700" bIns="12700" anchor="t">
+            <a:spAutoFit/>
+          </a:bodyPr>
+          <a:lstStyle/>
+          <a:p>
+            <a:pPr algn="l"/>
+            <a:r>
+              <a:rPr sz="2000" b="0">
+                <a:solidFill>
+                  <a:srgbClr val="252D36"/>
+                </a:solidFill>
+                <a:latin typeface="Aptos"/>
+              </a:rPr>
+              <a:t>Current-state understanding and application integration proposal</a:t>
+            </a:r>
+          </a:p>
+        </p:txBody>
+      </p:sp>
+      <p:sp>
+        <p:nvSpPr>
+          <p:cNvPr id="7" name="Rectangle 6"/>
           <p:cNvSpPr/>
           <p:nvPr/>
         </p:nvSpPr>
         <p:spPr>
           <a:xfrm>
-            <a:off x="2697480" y="4709160"/>
-            <a:ext cx="1600200" cy="566928"/>
-          </a:xfrm>
-          <a:prstGeom prst="roundRect">
+            <a:off x="768096" y="2926080"/>
+            <a:ext cx="1234440" cy="64008"/>
+          </a:xfrm>
+          <a:prstGeom prst="rect">
             <a:avLst/>
           </a:prstGeom>
           <a:solidFill>
-            <a:srgbClr val="DD3A05"/>
+            <a:srgbClr val="FF4B0A"/>
           </a:solidFill>
-          <a:ln w="15240">
-            <a:solidFill>
-              <a:srgbClr val="DD3A05"/>
-            </a:solidFill>
+          <a:ln>
+            <a:noFill/>
           </a:ln>
         </p:spPr>
         <p:style>
@@ -3391,140 +3332,23 @@
           </a:fontRef>
         </p:style>
         <p:txBody>
-          <a:bodyPr rtlCol="0" anchor="ctr" lIns="109728" rIns="109728"/>
+          <a:bodyPr rtlCol="0" anchor="ctr"/>
           <a:lstStyle/>
           <a:p>
             <a:pPr algn="ctr"/>
-            <a:r>
-              <a:rPr sz="1200" b="1">
-                <a:solidFill>
-                  <a:srgbClr val="FFFFFF"/>
-                </a:solidFill>
-                <a:latin typeface="Aptos"/>
-              </a:rPr>
-              <a:t>PROCESS</a:t>
-            </a:r>
-          </a:p>
-        </p:txBody>
-      </p:sp>
-      <p:sp>
-        <p:nvSpPr>
-          <p:cNvPr id="9" name="Rounded Rectangle 8"/>
-          <p:cNvSpPr/>
-          <p:nvPr/>
-        </p:nvSpPr>
-        <p:spPr>
-          <a:xfrm>
-            <a:off x="4663440" y="4709160"/>
-            <a:ext cx="1600200" cy="566928"/>
-          </a:xfrm>
-          <a:prstGeom prst="roundRect">
-            <a:avLst/>
-          </a:prstGeom>
-          <a:solidFill>
-            <a:srgbClr val="FF8936"/>
-          </a:solidFill>
-          <a:ln w="15240">
-            <a:solidFill>
-              <a:srgbClr val="FF8936"/>
-            </a:solidFill>
-          </a:ln>
-        </p:spPr>
-        <p:style>
-          <a:lnRef idx="1">
-            <a:schemeClr val="accent1"/>
-          </a:lnRef>
-          <a:fillRef idx="3">
-            <a:schemeClr val="accent1"/>
-          </a:fillRef>
-          <a:effectRef idx="2">
-            <a:schemeClr val="accent1"/>
-          </a:effectRef>
-          <a:fontRef idx="minor">
-            <a:schemeClr val="lt1"/>
-          </a:fontRef>
-        </p:style>
-        <p:txBody>
-          <a:bodyPr rtlCol="0" anchor="ctr" lIns="109728" rIns="109728"/>
-          <a:lstStyle/>
-          <a:p>
-            <a:pPr algn="ctr"/>
-            <a:r>
-              <a:rPr sz="1200" b="1">
-                <a:solidFill>
-                  <a:srgbClr val="FFFFFF"/>
-                </a:solidFill>
-                <a:latin typeface="Aptos"/>
-              </a:rPr>
-              <a:t>EXCEL</a:t>
-            </a:r>
-          </a:p>
-        </p:txBody>
-      </p:sp>
-      <p:sp>
-        <p:nvSpPr>
-          <p:cNvPr id="10" name="Rounded Rectangle 9"/>
-          <p:cNvSpPr/>
-          <p:nvPr/>
-        </p:nvSpPr>
-        <p:spPr>
-          <a:xfrm>
-            <a:off x="6629399" y="4709160"/>
-            <a:ext cx="1600200" cy="566928"/>
-          </a:xfrm>
-          <a:prstGeom prst="roundRect">
-            <a:avLst/>
-          </a:prstGeom>
-          <a:solidFill>
-            <a:srgbClr val="2F2F2F"/>
-          </a:solidFill>
-          <a:ln w="15240">
-            <a:solidFill>
-              <a:srgbClr val="2F2F2F"/>
-            </a:solidFill>
-          </a:ln>
-        </p:spPr>
-        <p:style>
-          <a:lnRef idx="1">
-            <a:schemeClr val="accent1"/>
-          </a:lnRef>
-          <a:fillRef idx="3">
-            <a:schemeClr val="accent1"/>
-          </a:fillRef>
-          <a:effectRef idx="2">
-            <a:schemeClr val="accent1"/>
-          </a:effectRef>
-          <a:fontRef idx="minor">
-            <a:schemeClr val="lt1"/>
-          </a:fontRef>
-        </p:style>
-        <p:txBody>
-          <a:bodyPr rtlCol="0" anchor="ctr" lIns="109728" rIns="109728"/>
-          <a:lstStyle/>
-          <a:p>
-            <a:pPr algn="ctr"/>
-            <a:r>
-              <a:rPr sz="1200" b="1">
-                <a:solidFill>
-                  <a:srgbClr val="FFFFFF"/>
-                </a:solidFill>
-                <a:latin typeface="Aptos"/>
-              </a:rPr>
-              <a:t>APPLICATION</a:t>
-            </a:r>
-          </a:p>
-        </p:txBody>
-      </p:sp>
-      <p:sp>
-        <p:nvSpPr>
-          <p:cNvPr id="11" name="TextBox 10"/>
+          </a:p>
+        </p:txBody>
+      </p:sp>
+      <p:sp>
+        <p:nvSpPr>
+          <p:cNvPr id="8" name="TextBox 7"/>
           <p:cNvSpPr txBox="1"/>
           <p:nvPr/>
         </p:nvSpPr>
         <p:spPr>
           <a:xfrm>
-            <a:off x="731520" y="6144768"/>
-            <a:ext cx="10332720" cy="228600"/>
+            <a:off x="749808" y="3337560"/>
+            <a:ext cx="1097280" cy="274320"/>
           </a:xfrm>
           <a:prstGeom prst="rect">
             <a:avLst/>
@@ -3539,9 +3363,79 @@
           <a:p>
             <a:pPr algn="l"/>
             <a:r>
+              <a:rPr sz="1400" b="1">
+                <a:solidFill>
+                  <a:srgbClr val="FF4B0A"/>
+                </a:solidFill>
+                <a:latin typeface="Aptos"/>
+              </a:rPr>
+              <a:t>Purpose</a:t>
+            </a:r>
+          </a:p>
+        </p:txBody>
+      </p:sp>
+      <p:sp>
+        <p:nvSpPr>
+          <p:cNvPr id="9" name="TextBox 8"/>
+          <p:cNvSpPr txBox="1"/>
+          <p:nvPr/>
+        </p:nvSpPr>
+        <p:spPr>
+          <a:xfrm>
+            <a:off x="749808" y="3730752"/>
+            <a:ext cx="9829800" cy="1005840"/>
+          </a:xfrm>
+          <a:prstGeom prst="rect">
+            <a:avLst/>
+          </a:prstGeom>
+          <a:noFill/>
+        </p:spPr>
+        <p:txBody>
+          <a:bodyPr wrap="none" lIns="25400" rIns="25400" tIns="12700" bIns="12700" anchor="t">
+            <a:spAutoFit/>
+          </a:bodyPr>
+          <a:lstStyle/>
+          <a:p>
+            <a:pPr algn="l"/>
+            <a:r>
+              <a:rPr sz="2200" b="1">
+                <a:solidFill>
+                  <a:srgbClr val="2F2F2F"/>
+                </a:solidFill>
+                <a:latin typeface="Aptos"/>
+              </a:rPr>
+              <a:t>Document what the existing loss-run process does today and present a possible path to make it available through the current application.</a:t>
+            </a:r>
+          </a:p>
+        </p:txBody>
+      </p:sp>
+      <p:sp>
+        <p:nvSpPr>
+          <p:cNvPr id="10" name="TextBox 9"/>
+          <p:cNvSpPr txBox="1"/>
+          <p:nvPr/>
+        </p:nvSpPr>
+        <p:spPr>
+          <a:xfrm>
+            <a:off x="768096" y="6144768"/>
+            <a:ext cx="10332720" cy="228600"/>
+          </a:xfrm>
+          <a:prstGeom prst="rect">
+            <a:avLst/>
+          </a:prstGeom>
+          <a:noFill/>
+        </p:spPr>
+        <p:txBody>
+          <a:bodyPr wrap="none" lIns="25400" rIns="25400" tIns="12700" bIns="12700" anchor="t">
+            <a:spAutoFit/>
+          </a:bodyPr>
+          <a:lstStyle/>
+          <a:p>
+            <a:pPr algn="l"/>
+            <a:r>
               <a:rPr sz="900" b="0">
                 <a:solidFill>
-                  <a:srgbClr val="FFFFFF"/>
+                  <a:srgbClr val="6F7A86"/>
                 </a:solidFill>
                 <a:latin typeface="Aptos"/>
               </a:rPr>
@@ -5698,7 +5592,7 @@
                 </a:solidFill>
                 <a:latin typeface="Aptos"/>
               </a:rPr>
-              <a:t>Current source systems and database relationship</a:t>
+              <a:t>Where the view lives—and where its data comes from</a:t>
             </a:r>
           </a:p>
         </p:txBody>
@@ -5754,8 +5648,8 @@
         </p:nvSpPr>
         <p:spPr>
           <a:xfrm>
-            <a:off x="2788920" y="1353312"/>
-            <a:ext cx="6629400" cy="585216"/>
+            <a:off x="2148840" y="1280160"/>
+            <a:ext cx="7909560" cy="530352"/>
           </a:xfrm>
           <a:prstGeom prst="roundRect">
             <a:avLst/>
@@ -5789,7 +5683,7 @@
           <a:p>
             <a:pPr algn="ctr"/>
             <a:r>
-              <a:rPr sz="1800" b="1">
+              <a:rPr sz="1700" b="1">
                 <a:solidFill>
                   <a:srgbClr val="FFFFFF"/>
                 </a:solidFill>
@@ -5802,100 +5696,14 @@
       </p:sp>
       <p:sp>
         <p:nvSpPr>
-          <p:cNvPr id="6" name="Down Arrow 5"/>
+          <p:cNvPr id="6" name="Rounded Rectangle 5"/>
           <p:cNvSpPr/>
           <p:nvPr/>
         </p:nvSpPr>
         <p:spPr>
           <a:xfrm>
-            <a:off x="4133087" y="1993392"/>
-            <a:ext cx="347472" cy="411480"/>
-          </a:xfrm>
-          <a:prstGeom prst="downArrow">
-            <a:avLst/>
-          </a:prstGeom>
-          <a:solidFill>
-            <a:srgbClr val="DD3A05"/>
-          </a:solidFill>
-          <a:ln>
-            <a:noFill/>
-          </a:ln>
-        </p:spPr>
-        <p:style>
-          <a:lnRef idx="1">
-            <a:schemeClr val="accent1"/>
-          </a:lnRef>
-          <a:fillRef idx="3">
-            <a:schemeClr val="accent1"/>
-          </a:fillRef>
-          <a:effectRef idx="2">
-            <a:schemeClr val="accent1"/>
-          </a:effectRef>
-          <a:fontRef idx="minor">
-            <a:schemeClr val="lt1"/>
-          </a:fontRef>
-        </p:style>
-        <p:txBody>
-          <a:bodyPr rtlCol="0" anchor="ctr"/>
-          <a:lstStyle/>
-          <a:p>
-            <a:pPr algn="ctr"/>
-          </a:p>
-        </p:txBody>
-      </p:sp>
-      <p:sp>
-        <p:nvSpPr>
-          <p:cNvPr id="7" name="Down Arrow 6"/>
-          <p:cNvSpPr/>
-          <p:nvPr/>
-        </p:nvSpPr>
-        <p:spPr>
-          <a:xfrm>
-            <a:off x="7680960" y="1993392"/>
-            <a:ext cx="347472" cy="411480"/>
-          </a:xfrm>
-          <a:prstGeom prst="downArrow">
-            <a:avLst/>
-          </a:prstGeom>
-          <a:solidFill>
-            <a:srgbClr val="DD3A05"/>
-          </a:solidFill>
-          <a:ln>
-            <a:noFill/>
-          </a:ln>
-        </p:spPr>
-        <p:style>
-          <a:lnRef idx="1">
-            <a:schemeClr val="accent1"/>
-          </a:lnRef>
-          <a:fillRef idx="3">
-            <a:schemeClr val="accent1"/>
-          </a:fillRef>
-          <a:effectRef idx="2">
-            <a:schemeClr val="accent1"/>
-          </a:effectRef>
-          <a:fontRef idx="minor">
-            <a:schemeClr val="lt1"/>
-          </a:fontRef>
-        </p:style>
-        <p:txBody>
-          <a:bodyPr rtlCol="0" anchor="ctr"/>
-          <a:lstStyle/>
-          <a:p>
-            <a:pPr algn="ctr"/>
-          </a:p>
-        </p:txBody>
-      </p:sp>
-      <p:sp>
-        <p:nvSpPr>
-          <p:cNvPr id="8" name="Rounded Rectangle 7"/>
-          <p:cNvSpPr/>
-          <p:nvPr/>
-        </p:nvSpPr>
-        <p:spPr>
-          <a:xfrm>
-            <a:off x="658368" y="2468880"/>
-            <a:ext cx="5257800" cy="2697480"/>
+            <a:off x="658368" y="2240280"/>
+            <a:ext cx="4709160" cy="2926080"/>
           </a:xfrm>
           <a:prstGeom prst="roundRect">
             <a:avLst/>
@@ -5958,14 +5766,120 @@
       </p:sp>
       <p:sp>
         <p:nvSpPr>
-          <p:cNvPr id="9" name="Rounded Rectangle 8"/>
+          <p:cNvPr id="7" name="TextBox 6"/>
+          <p:cNvSpPr txBox="1"/>
+          <p:nvPr/>
+        </p:nvSpPr>
+        <p:spPr>
+          <a:xfrm>
+            <a:off x="1042415" y="3063240"/>
+            <a:ext cx="3931920" cy="256032"/>
+          </a:xfrm>
+          <a:prstGeom prst="rect">
+            <a:avLst/>
+          </a:prstGeom>
+          <a:noFill/>
+        </p:spPr>
+        <p:txBody>
+          <a:bodyPr wrap="none" lIns="25400" rIns="25400" tIns="12700" bIns="12700" anchor="t">
+            <a:spAutoFit/>
+          </a:bodyPr>
+          <a:lstStyle/>
+          <a:p>
+            <a:pPr algn="ctr"/>
+            <a:r>
+              <a:rPr sz="1400" b="1">
+                <a:solidFill>
+                  <a:srgbClr val="FF4B0A"/>
+                </a:solidFill>
+                <a:latin typeface="Aptos"/>
+              </a:rPr>
+              <a:t>Underlying source tables</a:t>
+            </a:r>
+          </a:p>
+        </p:txBody>
+      </p:sp>
+      <p:sp>
+        <p:nvSpPr>
+          <p:cNvPr id="8" name="TextBox 7"/>
+          <p:cNvSpPr txBox="1"/>
+          <p:nvPr/>
+        </p:nvSpPr>
+        <p:spPr>
+          <a:xfrm>
+            <a:off x="1005840" y="3493008"/>
+            <a:ext cx="4005072" cy="713232"/>
+          </a:xfrm>
+          <a:prstGeom prst="rect">
+            <a:avLst/>
+          </a:prstGeom>
+          <a:noFill/>
+        </p:spPr>
+        <p:txBody>
+          <a:bodyPr wrap="none" lIns="25400" rIns="25400" tIns="12700" bIns="12700" anchor="t">
+            <a:spAutoFit/>
+          </a:bodyPr>
+          <a:lstStyle/>
+          <a:p>
+            <a:pPr algn="ctr"/>
+            <a:r>
+              <a:rPr sz="1500" b="0">
+                <a:solidFill>
+                  <a:srgbClr val="252D36"/>
+                </a:solidFill>
+                <a:latin typeface="Aptos"/>
+              </a:rPr>
+              <a:t>Claims • Policies • Financials
+Claimants • Vehicles • Litigation</a:t>
+            </a:r>
+          </a:p>
+        </p:txBody>
+      </p:sp>
+      <p:sp>
+        <p:nvSpPr>
+          <p:cNvPr id="9" name="TextBox 8"/>
+          <p:cNvSpPr txBox="1"/>
+          <p:nvPr/>
+        </p:nvSpPr>
+        <p:spPr>
+          <a:xfrm>
+            <a:off x="1024128" y="4480560"/>
+            <a:ext cx="3931920" cy="256032"/>
+          </a:xfrm>
+          <a:prstGeom prst="rect">
+            <a:avLst/>
+          </a:prstGeom>
+          <a:noFill/>
+        </p:spPr>
+        <p:txBody>
+          <a:bodyPr wrap="none" lIns="25400" rIns="25400" tIns="12700" bIns="12700" anchor="t">
+            <a:spAutoFit/>
+          </a:bodyPr>
+          <a:lstStyle/>
+          <a:p>
+            <a:pPr algn="ctr"/>
+            <a:r>
+              <a:rPr sz="1100" b="1">
+                <a:solidFill>
+                  <a:srgbClr val="6F7A86"/>
+                </a:solidFill>
+                <a:latin typeface="Aptos"/>
+              </a:rPr>
+              <a:t>The view reads these tables</a:t>
+            </a:r>
+          </a:p>
+        </p:txBody>
+      </p:sp>
+      <p:sp>
+        <p:nvSpPr>
+          <p:cNvPr id="10" name="Rounded Rectangle 9"/>
           <p:cNvSpPr/>
           <p:nvPr/>
         </p:nvSpPr>
         <p:spPr>
           <a:xfrm>
-            <a:off x="6263640" y="2468880"/>
-            <a:ext cx="5257800" cy="2697480"/>
+            <a:off x="6766560" y="2240280"/>
+            <a:ext cx="4754880" cy="2926080"/>
           </a:xfrm>
           <a:prstGeom prst="roundRect">
             <a:avLst/>
@@ -6028,108 +5942,140 @@
       </p:sp>
       <p:sp>
         <p:nvSpPr>
-          <p:cNvPr id="10" name="TextBox 9"/>
-          <p:cNvSpPr txBox="1"/>
-          <p:nvPr/>
-        </p:nvSpPr>
-        <p:spPr>
-          <a:xfrm>
-            <a:off x="1234440" y="3703320"/>
-            <a:ext cx="4114800" cy="731520"/>
-          </a:xfrm>
-          <a:prstGeom prst="rect">
-            <a:avLst/>
-          </a:prstGeom>
-          <a:noFill/>
-        </p:spPr>
-        <p:txBody>
-          <a:bodyPr wrap="none" lIns="25400" rIns="25400" tIns="12700" bIns="12700" anchor="t">
-            <a:spAutoFit/>
-          </a:bodyPr>
+          <p:cNvPr id="11" name="Rounded Rectangle 10"/>
+          <p:cNvSpPr/>
+          <p:nvPr/>
+        </p:nvSpPr>
+        <p:spPr>
+          <a:xfrm>
+            <a:off x="7150608" y="3172968"/>
+            <a:ext cx="1691640" cy="1005840"/>
+          </a:xfrm>
+          <a:prstGeom prst="roundRect">
+            <a:avLst/>
+          </a:prstGeom>
+          <a:solidFill>
+            <a:srgbClr val="FFFFFF"/>
+          </a:solidFill>
+          <a:ln w="15240">
+            <a:solidFill>
+              <a:srgbClr val="FF8936"/>
+            </a:solidFill>
+          </a:ln>
+        </p:spPr>
+        <p:style>
+          <a:lnRef idx="1">
+            <a:schemeClr val="accent1"/>
+          </a:lnRef>
+          <a:fillRef idx="3">
+            <a:schemeClr val="accent1"/>
+          </a:fillRef>
+          <a:effectRef idx="2">
+            <a:schemeClr val="accent1"/>
+          </a:effectRef>
+          <a:fontRef idx="minor">
+            <a:schemeClr val="lt1"/>
+          </a:fontRef>
+        </p:style>
+        <p:txBody>
+          <a:bodyPr rtlCol="0" anchor="ctr" lIns="109728" rIns="109728"/>
           <a:lstStyle/>
           <a:p>
             <a:pPr algn="ctr"/>
             <a:r>
-              <a:rPr sz="1500" b="0">
-                <a:solidFill>
-                  <a:srgbClr val="252D36"/>
-                </a:solidFill>
-                <a:latin typeface="Aptos"/>
-              </a:rPr>
-              <a:t>Claims  •  Policies  •  Financials
-Claimants  •  Vehicles  •  Litigation</a:t>
-            </a:r>
-          </a:p>
-        </p:txBody>
-      </p:sp>
-      <p:sp>
-        <p:nvSpPr>
-          <p:cNvPr id="11" name="TextBox 10"/>
-          <p:cNvSpPr txBox="1"/>
-          <p:nvPr/>
-        </p:nvSpPr>
-        <p:spPr>
-          <a:xfrm>
-            <a:off x="6629400" y="3547872"/>
-            <a:ext cx="2057400" cy="731520"/>
-          </a:xfrm>
-          <a:prstGeom prst="rect">
-            <a:avLst/>
-          </a:prstGeom>
-          <a:noFill/>
-        </p:spPr>
-        <p:txBody>
-          <a:bodyPr wrap="none" lIns="25400" rIns="25400" tIns="12700" bIns="12700" anchor="t">
-            <a:spAutoFit/>
-          </a:bodyPr>
+              <a:rPr sz="1400" b="1">
+                <a:solidFill>
+                  <a:srgbClr val="2F2F2F"/>
+                </a:solidFill>
+                <a:latin typeface="Aptos"/>
+              </a:rPr>
+              <a:t>tblAcctSpecial</a:t>
+            </a:r>
+          </a:p>
+          <a:p>
+            <a:pPr algn="ctr">
+              <a:spcBef>
+                <a:spcPts val="500"/>
+              </a:spcBef>
+            </a:pPr>
+            <a:r>
+              <a:rPr sz="900">
+                <a:solidFill>
+                  <a:srgbClr val="2F2F2F"/>
+                </a:solidFill>
+                <a:latin typeface="Aptos"/>
+              </a:rPr>
+              <a:t>Eligible customers</a:t>
+            </a:r>
+          </a:p>
+        </p:txBody>
+      </p:sp>
+      <p:sp>
+        <p:nvSpPr>
+          <p:cNvPr id="12" name="Rounded Rectangle 11"/>
+          <p:cNvSpPr/>
+          <p:nvPr/>
+        </p:nvSpPr>
+        <p:spPr>
+          <a:xfrm>
+            <a:off x="9189720" y="3172968"/>
+            <a:ext cx="1874519" cy="1005840"/>
+          </a:xfrm>
+          <a:prstGeom prst="roundRect">
+            <a:avLst/>
+          </a:prstGeom>
+          <a:solidFill>
+            <a:srgbClr val="FF4B0A"/>
+          </a:solidFill>
+          <a:ln w="15240">
+            <a:solidFill>
+              <a:srgbClr val="FF4B0A"/>
+            </a:solidFill>
+          </a:ln>
+        </p:spPr>
+        <p:style>
+          <a:lnRef idx="1">
+            <a:schemeClr val="accent1"/>
+          </a:lnRef>
+          <a:fillRef idx="3">
+            <a:schemeClr val="accent1"/>
+          </a:fillRef>
+          <a:effectRef idx="2">
+            <a:schemeClr val="accent1"/>
+          </a:effectRef>
+          <a:fontRef idx="minor">
+            <a:schemeClr val="lt1"/>
+          </a:fontRef>
+        </p:style>
+        <p:txBody>
+          <a:bodyPr rtlCol="0" anchor="ctr" lIns="109728" rIns="109728"/>
           <a:lstStyle/>
           <a:p>
             <a:pPr algn="ctr"/>
             <a:r>
-              <a:rPr sz="1400" b="1">
-                <a:solidFill>
-                  <a:srgbClr val="252D36"/>
-                </a:solidFill>
-                <a:latin typeface="Aptos"/>
-              </a:rPr>
-              <a:t>tblAcctSpecial
-Eligible customer configuration</a:t>
-            </a:r>
-          </a:p>
-        </p:txBody>
-      </p:sp>
-      <p:sp>
-        <p:nvSpPr>
-          <p:cNvPr id="12" name="TextBox 11"/>
-          <p:cNvSpPr txBox="1"/>
-          <p:nvPr/>
-        </p:nvSpPr>
-        <p:spPr>
-          <a:xfrm>
-            <a:off x="8979408" y="3547872"/>
-            <a:ext cx="2057400" cy="731520"/>
-          </a:xfrm>
-          <a:prstGeom prst="rect">
-            <a:avLst/>
-          </a:prstGeom>
-          <a:noFill/>
-        </p:spPr>
-        <p:txBody>
-          <a:bodyPr wrap="none" lIns="25400" rIns="25400" tIns="12700" bIns="12700" anchor="t">
-            <a:spAutoFit/>
-          </a:bodyPr>
-          <a:lstStyle/>
-          <a:p>
-            <a:pPr algn="ctr"/>
-            <a:r>
-              <a:rPr sz="1400" b="1">
-                <a:solidFill>
-                  <a:srgbClr val="252D36"/>
-                </a:solidFill>
-                <a:latin typeface="Aptos"/>
-              </a:rPr>
-              <a:t>SAC_Loss_Run
-Reporting view</a:t>
+              <a:rPr sz="1500" b="1">
+                <a:solidFill>
+                  <a:srgbClr val="FFFFFF"/>
+                </a:solidFill>
+                <a:latin typeface="Aptos"/>
+              </a:rPr>
+              <a:t>SAC_Loss_Run</a:t>
+            </a:r>
+          </a:p>
+          <a:p>
+            <a:pPr algn="ctr">
+              <a:spcBef>
+                <a:spcPts val="500"/>
+              </a:spcBef>
+            </a:pPr>
+            <a:r>
+              <a:rPr sz="1000">
+                <a:solidFill>
+                  <a:srgbClr val="FFFFFF"/>
+                </a:solidFill>
+                <a:latin typeface="Aptos"/>
+              </a:rPr>
+              <a:t>Reporting view lives here</a:t>
             </a:r>
           </a:p>
         </p:txBody>
@@ -6142,8 +6088,8 @@
         </p:nvSpPr>
         <p:spPr>
           <a:xfrm>
-            <a:off x="5779008" y="3657600"/>
-            <a:ext cx="384048" cy="310896"/>
+            <a:off x="8869680" y="3529584"/>
+            <a:ext cx="256032" cy="228600"/>
           </a:xfrm>
           <a:prstGeom prst="rightArrow">
             <a:avLst/>
@@ -6179,14 +6125,57 @@
       </p:sp>
       <p:sp>
         <p:nvSpPr>
-          <p:cNvPr id="14" name="TextBox 13"/>
+          <p:cNvPr id="14" name="Right Arrow 13"/>
+          <p:cNvSpPr/>
+          <p:nvPr/>
+        </p:nvSpPr>
+        <p:spPr>
+          <a:xfrm>
+            <a:off x="5532120" y="3401568"/>
+            <a:ext cx="960120" cy="438912"/>
+          </a:xfrm>
+          <a:prstGeom prst="rightArrow">
+            <a:avLst/>
+          </a:prstGeom>
+          <a:solidFill>
+            <a:srgbClr val="FF4B0A"/>
+          </a:solidFill>
+          <a:ln>
+            <a:noFill/>
+          </a:ln>
+        </p:spPr>
+        <p:style>
+          <a:lnRef idx="1">
+            <a:schemeClr val="accent1"/>
+          </a:lnRef>
+          <a:fillRef idx="3">
+            <a:schemeClr val="accent1"/>
+          </a:fillRef>
+          <a:effectRef idx="2">
+            <a:schemeClr val="accent1"/>
+          </a:effectRef>
+          <a:fontRef idx="minor">
+            <a:schemeClr val="lt1"/>
+          </a:fontRef>
+        </p:style>
+        <p:txBody>
+          <a:bodyPr rtlCol="0" anchor="ctr"/>
+          <a:lstStyle/>
+          <a:p>
+            <a:pPr algn="ctr"/>
+          </a:p>
+        </p:txBody>
+      </p:sp>
+      <p:sp>
+        <p:nvSpPr>
+          <p:cNvPr id="15" name="TextBox 14"/>
           <p:cNvSpPr txBox="1"/>
           <p:nvPr/>
         </p:nvSpPr>
         <p:spPr>
           <a:xfrm>
-            <a:off x="5056632" y="4023360"/>
-            <a:ext cx="1691640" cy="292608"/>
+            <a:off x="5303520" y="3913632"/>
+            <a:ext cx="1417320" cy="256032"/>
           </a:xfrm>
           <a:prstGeom prst="rect">
             <a:avLst/>
@@ -6207,14 +6196,14 @@
                 </a:solidFill>
                 <a:latin typeface="Aptos"/>
               </a:rPr>
-              <a:t>cross-database reads</a:t>
-            </a:r>
-          </a:p>
-        </p:txBody>
-      </p:sp>
-      <p:sp>
-        <p:nvSpPr>
-          <p:cNvPr id="15" name="Rounded Rectangle 14"/>
+              <a:t>cross-database read</a:t>
+            </a:r>
+          </a:p>
+        </p:txBody>
+      </p:sp>
+      <p:sp>
+        <p:nvSpPr>
+          <p:cNvPr id="16" name="Rounded Rectangle 15"/>
           <p:cNvSpPr/>
           <p:nvPr/>
         </p:nvSpPr>
@@ -6268,14 +6257,14 @@
       </p:sp>
       <p:sp>
         <p:nvSpPr>
-          <p:cNvPr id="16" name="TextBox 15"/>
+          <p:cNvPr id="17" name="TextBox 16"/>
           <p:cNvSpPr txBox="1"/>
           <p:nvPr/>
         </p:nvSpPr>
         <p:spPr>
           <a:xfrm>
-            <a:off x="1984248" y="5660136"/>
-            <a:ext cx="7863840" cy="320040"/>
+            <a:off x="1984248" y="5632704"/>
+            <a:ext cx="9144000" cy="438912"/>
           </a:xfrm>
           <a:prstGeom prst="rect">
             <a:avLst/>
@@ -6296,14 +6285,14 @@
                 </a:solidFill>
                 <a:latin typeface="Aptos"/>
               </a:rPr>
-              <a:t>Both databases are on the same server; they are separate databases.</a:t>
-            </a:r>
-          </a:p>
-        </p:txBody>
-      </p:sp>
-      <p:sp>
-        <p:nvSpPr>
-          <p:cNvPr id="17" name="TextBox 16"/>
+              <a:t>The view is stored in CLMAA_SpecialAccounts, but its SQL reads claims data from CLM_LakeHouse.</a:t>
+            </a:r>
+          </a:p>
+        </p:txBody>
+      </p:sp>
+      <p:sp>
+        <p:nvSpPr>
+          <p:cNvPr id="18" name="TextBox 17"/>
           <p:cNvSpPr txBox="1"/>
           <p:nvPr/>
         </p:nvSpPr>
@@ -6338,7 +6327,7 @@
       </p:sp>
       <p:sp>
         <p:nvSpPr>
-          <p:cNvPr id="18" name="TextBox 17"/>
+          <p:cNvPr id="19" name="TextBox 18"/>
           <p:cNvSpPr txBox="1"/>
           <p:nvPr/>
         </p:nvSpPr>
@@ -6462,7 +6451,7 @@
                 </a:solidFill>
                 <a:latin typeface="Aptos"/>
               </a:rPr>
-              <a:t>Two queries drive the current notebook</a:t>
+              <a:t>What the notebook queries—and how each result is used</a:t>
             </a:r>
           </a:p>
         </p:txBody>
@@ -6518,8 +6507,8 @@
         </p:nvSpPr>
         <p:spPr>
           <a:xfrm>
-            <a:off x="713232" y="1417320"/>
-            <a:ext cx="1005840" cy="320040"/>
+            <a:off x="658368" y="1353312"/>
+            <a:ext cx="987552" cy="320040"/>
           </a:xfrm>
           <a:prstGeom prst="roundRect">
             <a:avLst/>
@@ -6572,8 +6561,8 @@
         </p:nvSpPr>
         <p:spPr>
           <a:xfrm>
-            <a:off x="713232" y="1856231"/>
-            <a:ext cx="5257800" cy="1051560"/>
+            <a:off x="658368" y="1792224"/>
+            <a:ext cx="5330952" cy="658368"/>
           </a:xfrm>
           <a:prstGeom prst="roundRect">
             <a:avLst/>
@@ -6607,86 +6596,27 @@
           <a:p>
             <a:pPr algn="ctr"/>
             <a:r>
-              <a:rPr sz="2000" b="1">
+              <a:rPr sz="1900" b="1">
                 <a:solidFill>
                   <a:srgbClr val="2F2F2F"/>
                 </a:solidFill>
                 <a:latin typeface="Aptos"/>
               </a:rPr>
-              <a:t>Find eligible customers</a:t>
-            </a:r>
-          </a:p>
-          <a:p>
-            <a:pPr algn="ctr">
-              <a:spcBef>
-                <a:spcPts val="500"/>
-              </a:spcBef>
-            </a:pPr>
-            <a:r>
-              <a:rPr sz="1500">
-                <a:solidFill>
-                  <a:srgbClr val="2F2F2F"/>
-                </a:solidFill>
-                <a:latin typeface="Aptos"/>
-              </a:rPr>
-              <a:t>Reads tblAcctSpecial</a:t>
-            </a:r>
-          </a:p>
-        </p:txBody>
-      </p:sp>
-      <p:sp>
-        <p:nvSpPr>
-          <p:cNvPr id="7" name="Oval 6"/>
-          <p:cNvSpPr/>
-          <p:nvPr/>
-        </p:nvSpPr>
-        <p:spPr>
-          <a:xfrm>
-            <a:off x="960120" y="3282696"/>
-            <a:ext cx="91440" cy="91440"/>
-          </a:xfrm>
-          <a:prstGeom prst="ellipse">
-            <a:avLst/>
-          </a:prstGeom>
-          <a:solidFill>
-            <a:srgbClr val="DD3A05"/>
-          </a:solidFill>
-          <a:ln>
-            <a:noFill/>
-          </a:ln>
-        </p:spPr>
-        <p:style>
-          <a:lnRef idx="1">
-            <a:schemeClr val="accent1"/>
-          </a:lnRef>
-          <a:fillRef idx="3">
-            <a:schemeClr val="accent1"/>
-          </a:fillRef>
-          <a:effectRef idx="2">
-            <a:schemeClr val="accent1"/>
-          </a:effectRef>
-          <a:fontRef idx="minor">
-            <a:schemeClr val="lt1"/>
-          </a:fontRef>
-        </p:style>
-        <p:txBody>
-          <a:bodyPr rtlCol="0" anchor="ctr"/>
-          <a:lstStyle/>
-          <a:p>
-            <a:pPr algn="ctr"/>
-          </a:p>
-        </p:txBody>
-      </p:sp>
-      <p:sp>
-        <p:nvSpPr>
-          <p:cNvPr id="8" name="TextBox 7"/>
+              <a:t>Eligible-customer query</a:t>
+            </a:r>
+          </a:p>
+        </p:txBody>
+      </p:sp>
+      <p:sp>
+        <p:nvSpPr>
+          <p:cNvPr id="7" name="TextBox 6"/>
           <p:cNvSpPr txBox="1"/>
           <p:nvPr/>
         </p:nvSpPr>
         <p:spPr>
           <a:xfrm>
-            <a:off x="1161288" y="3182112"/>
-            <a:ext cx="4507992" cy="502919"/>
+            <a:off x="896112" y="2660904"/>
+            <a:ext cx="731520" cy="228600"/>
           </a:xfrm>
           <a:prstGeom prst="rect">
             <a:avLst/>
@@ -6701,70 +6631,27 @@
           <a:p>
             <a:pPr algn="l"/>
             <a:r>
-              <a:rPr sz="1500" b="0">
-                <a:solidFill>
-                  <a:srgbClr val="252D36"/>
-                </a:solidFill>
-                <a:latin typeface="Aptos"/>
-              </a:rPr>
-              <a:t>Account status is Active</a:t>
-            </a:r>
-          </a:p>
-        </p:txBody>
-      </p:sp>
-      <p:sp>
-        <p:nvSpPr>
-          <p:cNvPr id="9" name="Oval 8"/>
-          <p:cNvSpPr/>
-          <p:nvPr/>
-        </p:nvSpPr>
-        <p:spPr>
-          <a:xfrm>
-            <a:off x="960120" y="3785616"/>
-            <a:ext cx="91440" cy="91440"/>
-          </a:xfrm>
-          <a:prstGeom prst="ellipse">
-            <a:avLst/>
-          </a:prstGeom>
-          <a:solidFill>
-            <a:srgbClr val="DD3A05"/>
-          </a:solidFill>
-          <a:ln>
-            <a:noFill/>
-          </a:ln>
-        </p:spPr>
-        <p:style>
-          <a:lnRef idx="1">
-            <a:schemeClr val="accent1"/>
-          </a:lnRef>
-          <a:fillRef idx="3">
-            <a:schemeClr val="accent1"/>
-          </a:fillRef>
-          <a:effectRef idx="2">
-            <a:schemeClr val="accent1"/>
-          </a:effectRef>
-          <a:fontRef idx="minor">
-            <a:schemeClr val="lt1"/>
-          </a:fontRef>
-        </p:style>
-        <p:txBody>
-          <a:bodyPr rtlCol="0" anchor="ctr"/>
-          <a:lstStyle/>
-          <a:p>
-            <a:pPr algn="ctr"/>
-          </a:p>
-        </p:txBody>
-      </p:sp>
-      <p:sp>
-        <p:nvSpPr>
-          <p:cNvPr id="10" name="TextBox 9"/>
+              <a:rPr sz="1100" b="1">
+                <a:solidFill>
+                  <a:srgbClr val="FF4B0A"/>
+                </a:solidFill>
+                <a:latin typeface="Aptos"/>
+              </a:rPr>
+              <a:t>Source</a:t>
+            </a:r>
+          </a:p>
+        </p:txBody>
+      </p:sp>
+      <p:sp>
+        <p:nvSpPr>
+          <p:cNvPr id="8" name="TextBox 7"/>
           <p:cNvSpPr txBox="1"/>
           <p:nvPr/>
         </p:nvSpPr>
         <p:spPr>
           <a:xfrm>
-            <a:off x="1161288" y="3685032"/>
-            <a:ext cx="4507992" cy="502919"/>
+            <a:off x="1664208" y="2633472"/>
+            <a:ext cx="3977639" cy="292608"/>
           </a:xfrm>
           <a:prstGeom prst="rect">
             <a:avLst/>
@@ -6779,70 +6666,27 @@
           <a:p>
             <a:pPr algn="l"/>
             <a:r>
-              <a:rPr sz="1500" b="0">
-                <a:solidFill>
-                  <a:srgbClr val="252D36"/>
-                </a:solidFill>
-                <a:latin typeface="Aptos"/>
-              </a:rPr>
-              <a:t>Loss-run frequency is provided</a:t>
-            </a:r>
-          </a:p>
-        </p:txBody>
-      </p:sp>
-      <p:sp>
-        <p:nvSpPr>
-          <p:cNvPr id="11" name="Oval 10"/>
-          <p:cNvSpPr/>
-          <p:nvPr/>
-        </p:nvSpPr>
-        <p:spPr>
-          <a:xfrm>
-            <a:off x="960120" y="4288536"/>
-            <a:ext cx="91440" cy="91440"/>
-          </a:xfrm>
-          <a:prstGeom prst="ellipse">
-            <a:avLst/>
-          </a:prstGeom>
-          <a:solidFill>
-            <a:srgbClr val="DD3A05"/>
-          </a:solidFill>
-          <a:ln>
-            <a:noFill/>
-          </a:ln>
-        </p:spPr>
-        <p:style>
-          <a:lnRef idx="1">
-            <a:schemeClr val="accent1"/>
-          </a:lnRef>
-          <a:fillRef idx="3">
-            <a:schemeClr val="accent1"/>
-          </a:fillRef>
-          <a:effectRef idx="2">
-            <a:schemeClr val="accent1"/>
-          </a:effectRef>
-          <a:fontRef idx="minor">
-            <a:schemeClr val="lt1"/>
-          </a:fontRef>
-        </p:style>
-        <p:txBody>
-          <a:bodyPr rtlCol="0" anchor="ctr"/>
-          <a:lstStyle/>
-          <a:p>
-            <a:pPr algn="ctr"/>
-          </a:p>
-        </p:txBody>
-      </p:sp>
-      <p:sp>
-        <p:nvSpPr>
-          <p:cNvPr id="12" name="TextBox 11"/>
+              <a:rPr sz="1300" b="1">
+                <a:solidFill>
+                  <a:srgbClr val="2F2F2F"/>
+                </a:solidFill>
+                <a:latin typeface="Aptos"/>
+              </a:rPr>
+              <a:t>CLMAA_SpecialAccounts.dbo.tblAcctSpecial</a:t>
+            </a:r>
+          </a:p>
+        </p:txBody>
+      </p:sp>
+      <p:sp>
+        <p:nvSpPr>
+          <p:cNvPr id="9" name="TextBox 8"/>
           <p:cNvSpPr txBox="1"/>
           <p:nvPr/>
         </p:nvSpPr>
         <p:spPr>
           <a:xfrm>
-            <a:off x="1161288" y="4187952"/>
-            <a:ext cx="4507992" cy="502919"/>
+            <a:off x="896112" y="3127248"/>
+            <a:ext cx="731520" cy="228600"/>
           </a:xfrm>
           <a:prstGeom prst="rect">
             <a:avLst/>
@@ -6857,27 +6701,202 @@
           <a:p>
             <a:pPr algn="l"/>
             <a:r>
-              <a:rPr sz="1500" b="0">
+              <a:rPr sz="1100" b="1">
+                <a:solidFill>
+                  <a:srgbClr val="FF4B0A"/>
+                </a:solidFill>
+                <a:latin typeface="Aptos"/>
+              </a:rPr>
+              <a:t>Filters</a:t>
+            </a:r>
+          </a:p>
+        </p:txBody>
+      </p:sp>
+      <p:sp>
+        <p:nvSpPr>
+          <p:cNvPr id="10" name="TextBox 9"/>
+          <p:cNvSpPr txBox="1"/>
+          <p:nvPr/>
+        </p:nvSpPr>
+        <p:spPr>
+          <a:xfrm>
+            <a:off x="1664208" y="3099816"/>
+            <a:ext cx="4069080" cy="502920"/>
+          </a:xfrm>
+          <a:prstGeom prst="rect">
+            <a:avLst/>
+          </a:prstGeom>
+          <a:noFill/>
+        </p:spPr>
+        <p:txBody>
+          <a:bodyPr wrap="none" lIns="25400" rIns="25400" tIns="12700" bIns="12700" anchor="t">
+            <a:spAutoFit/>
+          </a:bodyPr>
+          <a:lstStyle/>
+          <a:p>
+            <a:pPr algn="l"/>
+            <a:r>
+              <a:rPr sz="1300" b="0">
                 <a:solidFill>
                   <a:srgbClr val="252D36"/>
                 </a:solidFill>
                 <a:latin typeface="Aptos"/>
               </a:rPr>
-              <a:t>Frequency is not ‘Not Needed’</a:t>
-            </a:r>
-          </a:p>
-        </p:txBody>
-      </p:sp>
-      <p:sp>
-        <p:nvSpPr>
-          <p:cNvPr id="13" name="Rounded Rectangle 12"/>
+              <a:t>Active account • frequency present • frequency is not ‘Not Needed’</a:t>
+            </a:r>
+          </a:p>
+        </p:txBody>
+      </p:sp>
+      <p:sp>
+        <p:nvSpPr>
+          <p:cNvPr id="11" name="TextBox 10"/>
+          <p:cNvSpPr txBox="1"/>
+          <p:nvPr/>
+        </p:nvSpPr>
+        <p:spPr>
+          <a:xfrm>
+            <a:off x="896112" y="3813048"/>
+            <a:ext cx="731520" cy="228600"/>
+          </a:xfrm>
+          <a:prstGeom prst="rect">
+            <a:avLst/>
+          </a:prstGeom>
+          <a:noFill/>
+        </p:spPr>
+        <p:txBody>
+          <a:bodyPr wrap="none" lIns="25400" rIns="25400" tIns="12700" bIns="12700" anchor="t">
+            <a:spAutoFit/>
+          </a:bodyPr>
+          <a:lstStyle/>
+          <a:p>
+            <a:pPr algn="l"/>
+            <a:r>
+              <a:rPr sz="1100" b="1">
+                <a:solidFill>
+                  <a:srgbClr val="FF4B0A"/>
+                </a:solidFill>
+                <a:latin typeface="Aptos"/>
+              </a:rPr>
+              <a:t>Returns</a:t>
+            </a:r>
+          </a:p>
+        </p:txBody>
+      </p:sp>
+      <p:sp>
+        <p:nvSpPr>
+          <p:cNvPr id="12" name="TextBox 11"/>
+          <p:cNvSpPr txBox="1"/>
+          <p:nvPr/>
+        </p:nvSpPr>
+        <p:spPr>
+          <a:xfrm>
+            <a:off x="1664208" y="3785615"/>
+            <a:ext cx="3977639" cy="475488"/>
+          </a:xfrm>
+          <a:prstGeom prst="rect">
+            <a:avLst/>
+          </a:prstGeom>
+          <a:noFill/>
+        </p:spPr>
+        <p:txBody>
+          <a:bodyPr wrap="none" lIns="25400" rIns="25400" tIns="12700" bIns="12700" anchor="t">
+            <a:spAutoFit/>
+          </a:bodyPr>
+          <a:lstStyle/>
+          <a:p>
+            <a:pPr algn="l"/>
+            <a:r>
+              <a:rPr sz="1300" b="0">
+                <a:solidFill>
+                  <a:srgbClr val="252D36"/>
+                </a:solidFill>
+                <a:latin typeface="Aptos"/>
+              </a:rPr>
+              <a:t>Customer number, customer name and loss-run frequency</a:t>
+            </a:r>
+          </a:p>
+        </p:txBody>
+      </p:sp>
+      <p:sp>
+        <p:nvSpPr>
+          <p:cNvPr id="13" name="TextBox 12"/>
+          <p:cNvSpPr txBox="1"/>
+          <p:nvPr/>
+        </p:nvSpPr>
+        <p:spPr>
+          <a:xfrm>
+            <a:off x="896112" y="4462272"/>
+            <a:ext cx="731520" cy="228600"/>
+          </a:xfrm>
+          <a:prstGeom prst="rect">
+            <a:avLst/>
+          </a:prstGeom>
+          <a:noFill/>
+        </p:spPr>
+        <p:txBody>
+          <a:bodyPr wrap="none" lIns="25400" rIns="25400" tIns="12700" bIns="12700" anchor="t">
+            <a:spAutoFit/>
+          </a:bodyPr>
+          <a:lstStyle/>
+          <a:p>
+            <a:pPr algn="l"/>
+            <a:r>
+              <a:rPr sz="1100" b="1">
+                <a:solidFill>
+                  <a:srgbClr val="FF4B0A"/>
+                </a:solidFill>
+                <a:latin typeface="Aptos"/>
+              </a:rPr>
+              <a:t>Used for</a:t>
+            </a:r>
+          </a:p>
+        </p:txBody>
+      </p:sp>
+      <p:sp>
+        <p:nvSpPr>
+          <p:cNvPr id="14" name="TextBox 13"/>
+          <p:cNvSpPr txBox="1"/>
+          <p:nvPr/>
+        </p:nvSpPr>
+        <p:spPr>
+          <a:xfrm>
+            <a:off x="1664208" y="4434840"/>
+            <a:ext cx="3977639" cy="475488"/>
+          </a:xfrm>
+          <a:prstGeom prst="rect">
+            <a:avLst/>
+          </a:prstGeom>
+          <a:noFill/>
+        </p:spPr>
+        <p:txBody>
+          <a:bodyPr wrap="none" lIns="25400" rIns="25400" tIns="12700" bIns="12700" anchor="t">
+            <a:spAutoFit/>
+          </a:bodyPr>
+          <a:lstStyle/>
+          <a:p>
+            <a:pPr algn="l"/>
+            <a:r>
+              <a:rPr sz="1300" b="0">
+                <a:solidFill>
+                  <a:srgbClr val="252D36"/>
+                </a:solidFill>
+                <a:latin typeface="Aptos"/>
+              </a:rPr>
+              <a:t>Builds the list of customers processed by the notebook</a:t>
+            </a:r>
+          </a:p>
+        </p:txBody>
+      </p:sp>
+      <p:sp>
+        <p:nvSpPr>
+          <p:cNvPr id="15" name="Rounded Rectangle 14"/>
           <p:cNvSpPr/>
           <p:nvPr/>
         </p:nvSpPr>
         <p:spPr>
           <a:xfrm>
-            <a:off x="6217920" y="1417320"/>
-            <a:ext cx="1005840" cy="320040"/>
+            <a:off x="6236208" y="1353312"/>
+            <a:ext cx="987552" cy="320040"/>
           </a:xfrm>
           <a:prstGeom prst="roundRect">
             <a:avLst/>
@@ -6924,14 +6943,14 @@
       </p:sp>
       <p:sp>
         <p:nvSpPr>
-          <p:cNvPr id="14" name="Rounded Rectangle 13"/>
+          <p:cNvPr id="16" name="Rounded Rectangle 15"/>
           <p:cNvSpPr/>
           <p:nvPr/>
         </p:nvSpPr>
         <p:spPr>
           <a:xfrm>
-            <a:off x="6217920" y="1856231"/>
-            <a:ext cx="5257800" cy="1051560"/>
+            <a:off x="6236208" y="1792224"/>
+            <a:ext cx="5303520" cy="658368"/>
           </a:xfrm>
           <a:prstGeom prst="roundRect">
             <a:avLst/>
@@ -6965,86 +6984,27 @@
           <a:p>
             <a:pPr algn="ctr"/>
             <a:r>
-              <a:rPr sz="2000" b="1">
+              <a:rPr sz="1900" b="1">
                 <a:solidFill>
                   <a:srgbClr val="2F2F2F"/>
                 </a:solidFill>
                 <a:latin typeface="Aptos"/>
               </a:rPr>
-              <a:t>Read prepared loss-run data</a:t>
-            </a:r>
-          </a:p>
-          <a:p>
-            <a:pPr algn="ctr">
-              <a:spcBef>
-                <a:spcPts val="500"/>
-              </a:spcBef>
-            </a:pPr>
-            <a:r>
-              <a:rPr sz="1500">
-                <a:solidFill>
-                  <a:srgbClr val="2F2F2F"/>
-                </a:solidFill>
-                <a:latin typeface="Aptos"/>
-              </a:rPr>
-              <a:t>SELECT * FROM SAC_Loss_Run</a:t>
-            </a:r>
-          </a:p>
-        </p:txBody>
-      </p:sp>
-      <p:sp>
-        <p:nvSpPr>
-          <p:cNvPr id="15" name="Oval 14"/>
-          <p:cNvSpPr/>
-          <p:nvPr/>
-        </p:nvSpPr>
-        <p:spPr>
-          <a:xfrm>
-            <a:off x="6473952" y="3282696"/>
-            <a:ext cx="91440" cy="91440"/>
-          </a:xfrm>
-          <a:prstGeom prst="ellipse">
-            <a:avLst/>
-          </a:prstGeom>
-          <a:solidFill>
-            <a:srgbClr val="DD3A05"/>
-          </a:solidFill>
-          <a:ln>
-            <a:noFill/>
-          </a:ln>
-        </p:spPr>
-        <p:style>
-          <a:lnRef idx="1">
-            <a:schemeClr val="accent1"/>
-          </a:lnRef>
-          <a:fillRef idx="3">
-            <a:schemeClr val="accent1"/>
-          </a:fillRef>
-          <a:effectRef idx="2">
-            <a:schemeClr val="accent1"/>
-          </a:effectRef>
-          <a:fontRef idx="minor">
-            <a:schemeClr val="lt1"/>
-          </a:fontRef>
-        </p:style>
-        <p:txBody>
-          <a:bodyPr rtlCol="0" anchor="ctr"/>
-          <a:lstStyle/>
-          <a:p>
-            <a:pPr algn="ctr"/>
-          </a:p>
-        </p:txBody>
-      </p:sp>
-      <p:sp>
-        <p:nvSpPr>
-          <p:cNvPr id="16" name="TextBox 15"/>
+              <a:t>Loss-run data query</a:t>
+            </a:r>
+          </a:p>
+        </p:txBody>
+      </p:sp>
+      <p:sp>
+        <p:nvSpPr>
+          <p:cNvPr id="17" name="TextBox 16"/>
           <p:cNvSpPr txBox="1"/>
           <p:nvPr/>
         </p:nvSpPr>
         <p:spPr>
           <a:xfrm>
-            <a:off x="6675120" y="3182112"/>
-            <a:ext cx="4462272" cy="502919"/>
+            <a:off x="6473952" y="2660904"/>
+            <a:ext cx="731520" cy="228600"/>
           </a:xfrm>
           <a:prstGeom prst="rect">
             <a:avLst/>
@@ -7059,57 +7019,14 @@
           <a:p>
             <a:pPr algn="l"/>
             <a:r>
-              <a:rPr sz="1500" b="0">
-                <a:solidFill>
-                  <a:srgbClr val="252D36"/>
-                </a:solidFill>
-                <a:latin typeface="Aptos"/>
-              </a:rPr>
-              <a:t>Returns report-ready rows for qualifying accounts</a:t>
-            </a:r>
-          </a:p>
-        </p:txBody>
-      </p:sp>
-      <p:sp>
-        <p:nvSpPr>
-          <p:cNvPr id="17" name="Oval 16"/>
-          <p:cNvSpPr/>
-          <p:nvPr/>
-        </p:nvSpPr>
-        <p:spPr>
-          <a:xfrm>
-            <a:off x="6473952" y="3785616"/>
-            <a:ext cx="91440" cy="91440"/>
-          </a:xfrm>
-          <a:prstGeom prst="ellipse">
-            <a:avLst/>
-          </a:prstGeom>
-          <a:solidFill>
-            <a:srgbClr val="DD3A05"/>
-          </a:solidFill>
-          <a:ln>
-            <a:noFill/>
-          </a:ln>
-        </p:spPr>
-        <p:style>
-          <a:lnRef idx="1">
-            <a:schemeClr val="accent1"/>
-          </a:lnRef>
-          <a:fillRef idx="3">
-            <a:schemeClr val="accent1"/>
-          </a:fillRef>
-          <a:effectRef idx="2">
-            <a:schemeClr val="accent1"/>
-          </a:effectRef>
-          <a:fontRef idx="minor">
-            <a:schemeClr val="lt1"/>
-          </a:fontRef>
-        </p:style>
-        <p:txBody>
-          <a:bodyPr rtlCol="0" anchor="ctr"/>
-          <a:lstStyle/>
-          <a:p>
-            <a:pPr algn="ctr"/>
+              <a:rPr sz="1100" b="1">
+                <a:solidFill>
+                  <a:srgbClr val="DD3A05"/>
+                </a:solidFill>
+                <a:latin typeface="Aptos"/>
+              </a:rPr>
+              <a:t>Source</a:t>
+            </a:r>
           </a:p>
         </p:txBody>
       </p:sp>
@@ -7121,8 +7038,8 @@
         </p:nvSpPr>
         <p:spPr>
           <a:xfrm>
-            <a:off x="6675120" y="3685032"/>
-            <a:ext cx="4462272" cy="502919"/>
+            <a:off x="7242048" y="2633472"/>
+            <a:ext cx="3931920" cy="292608"/>
           </a:xfrm>
           <a:prstGeom prst="rect">
             <a:avLst/>
@@ -7137,70 +7054,27 @@
           <a:p>
             <a:pPr algn="l"/>
             <a:r>
-              <a:rPr sz="1500" b="0">
-                <a:solidFill>
-                  <a:srgbClr val="252D36"/>
-                </a:solidFill>
-                <a:latin typeface="Aptos"/>
-              </a:rPr>
-              <a:t>Notebook separates the result by customer</a:t>
-            </a:r>
-          </a:p>
-        </p:txBody>
-      </p:sp>
-      <p:sp>
-        <p:nvSpPr>
-          <p:cNvPr id="19" name="Oval 18"/>
-          <p:cNvSpPr/>
-          <p:nvPr/>
-        </p:nvSpPr>
-        <p:spPr>
-          <a:xfrm>
-            <a:off x="6473952" y="4288536"/>
-            <a:ext cx="91440" cy="91440"/>
-          </a:xfrm>
-          <a:prstGeom prst="ellipse">
-            <a:avLst/>
-          </a:prstGeom>
-          <a:solidFill>
-            <a:srgbClr val="DD3A05"/>
-          </a:solidFill>
-          <a:ln>
-            <a:noFill/>
-          </a:ln>
-        </p:spPr>
-        <p:style>
-          <a:lnRef idx="1">
-            <a:schemeClr val="accent1"/>
-          </a:lnRef>
-          <a:fillRef idx="3">
-            <a:schemeClr val="accent1"/>
-          </a:fillRef>
-          <a:effectRef idx="2">
-            <a:schemeClr val="accent1"/>
-          </a:effectRef>
-          <a:fontRef idx="minor">
-            <a:schemeClr val="lt1"/>
-          </a:fontRef>
-        </p:style>
-        <p:txBody>
-          <a:bodyPr rtlCol="0" anchor="ctr"/>
-          <a:lstStyle/>
-          <a:p>
-            <a:pPr algn="ctr"/>
-          </a:p>
-        </p:txBody>
-      </p:sp>
-      <p:sp>
-        <p:nvSpPr>
-          <p:cNvPr id="20" name="TextBox 19"/>
+              <a:rPr sz="1300" b="1">
+                <a:solidFill>
+                  <a:srgbClr val="2F2F2F"/>
+                </a:solidFill>
+                <a:latin typeface="Aptos"/>
+              </a:rPr>
+              <a:t>CLMAA_SpecialAccounts.dbo.SAC_Loss_Run</a:t>
+            </a:r>
+          </a:p>
+        </p:txBody>
+      </p:sp>
+      <p:sp>
+        <p:nvSpPr>
+          <p:cNvPr id="19" name="TextBox 18"/>
           <p:cNvSpPr txBox="1"/>
           <p:nvPr/>
         </p:nvSpPr>
         <p:spPr>
           <a:xfrm>
-            <a:off x="6675120" y="4187952"/>
-            <a:ext cx="4462272" cy="502919"/>
+            <a:off x="6473952" y="3127248"/>
+            <a:ext cx="731520" cy="228600"/>
           </a:xfrm>
           <a:prstGeom prst="rect">
             <a:avLst/>
@@ -7215,27 +7089,202 @@
           <a:p>
             <a:pPr algn="l"/>
             <a:r>
-              <a:rPr sz="1500" b="0">
+              <a:rPr sz="1100" b="1">
+                <a:solidFill>
+                  <a:srgbClr val="DD3A05"/>
+                </a:solidFill>
+                <a:latin typeface="Aptos"/>
+              </a:rPr>
+              <a:t>Statement</a:t>
+            </a:r>
+          </a:p>
+        </p:txBody>
+      </p:sp>
+      <p:sp>
+        <p:nvSpPr>
+          <p:cNvPr id="20" name="TextBox 19"/>
+          <p:cNvSpPr txBox="1"/>
+          <p:nvPr/>
+        </p:nvSpPr>
+        <p:spPr>
+          <a:xfrm>
+            <a:off x="7242048" y="3099816"/>
+            <a:ext cx="3931920" cy="292608"/>
+          </a:xfrm>
+          <a:prstGeom prst="rect">
+            <a:avLst/>
+          </a:prstGeom>
+          <a:noFill/>
+        </p:spPr>
+        <p:txBody>
+          <a:bodyPr wrap="none" lIns="25400" rIns="25400" tIns="12700" bIns="12700" anchor="t">
+            <a:spAutoFit/>
+          </a:bodyPr>
+          <a:lstStyle/>
+          <a:p>
+            <a:pPr algn="l"/>
+            <a:r>
+              <a:rPr sz="1300" b="1">
                 <a:solidFill>
                   <a:srgbClr val="252D36"/>
                 </a:solidFill>
                 <a:latin typeface="Aptos"/>
               </a:rPr>
-              <a:t>Future UI flow can request only the selected customer</a:t>
-            </a:r>
-          </a:p>
-        </p:txBody>
-      </p:sp>
-      <p:sp>
-        <p:nvSpPr>
-          <p:cNvPr id="21" name="Rounded Rectangle 20"/>
+              <a:t>SELECT * FROM SAC_Loss_Run</a:t>
+            </a:r>
+          </a:p>
+        </p:txBody>
+      </p:sp>
+      <p:sp>
+        <p:nvSpPr>
+          <p:cNvPr id="21" name="TextBox 20"/>
+          <p:cNvSpPr txBox="1"/>
+          <p:nvPr/>
+        </p:nvSpPr>
+        <p:spPr>
+          <a:xfrm>
+            <a:off x="6473952" y="3813048"/>
+            <a:ext cx="731520" cy="228600"/>
+          </a:xfrm>
+          <a:prstGeom prst="rect">
+            <a:avLst/>
+          </a:prstGeom>
+          <a:noFill/>
+        </p:spPr>
+        <p:txBody>
+          <a:bodyPr wrap="none" lIns="25400" rIns="25400" tIns="12700" bIns="12700" anchor="t">
+            <a:spAutoFit/>
+          </a:bodyPr>
+          <a:lstStyle/>
+          <a:p>
+            <a:pPr algn="l"/>
+            <a:r>
+              <a:rPr sz="1100" b="1">
+                <a:solidFill>
+                  <a:srgbClr val="DD3A05"/>
+                </a:solidFill>
+                <a:latin typeface="Aptos"/>
+              </a:rPr>
+              <a:t>Returns</a:t>
+            </a:r>
+          </a:p>
+        </p:txBody>
+      </p:sp>
+      <p:sp>
+        <p:nvSpPr>
+          <p:cNvPr id="22" name="TextBox 21"/>
+          <p:cNvSpPr txBox="1"/>
+          <p:nvPr/>
+        </p:nvSpPr>
+        <p:spPr>
+          <a:xfrm>
+            <a:off x="7242048" y="3785615"/>
+            <a:ext cx="3931920" cy="475488"/>
+          </a:xfrm>
+          <a:prstGeom prst="rect">
+            <a:avLst/>
+          </a:prstGeom>
+          <a:noFill/>
+        </p:spPr>
+        <p:txBody>
+          <a:bodyPr wrap="none" lIns="25400" rIns="25400" tIns="12700" bIns="12700" anchor="t">
+            <a:spAutoFit/>
+          </a:bodyPr>
+          <a:lstStyle/>
+          <a:p>
+            <a:pPr algn="l"/>
+            <a:r>
+              <a:rPr sz="1300" b="0">
+                <a:solidFill>
+                  <a:srgbClr val="252D36"/>
+                </a:solidFill>
+                <a:latin typeface="Aptos"/>
+              </a:rPr>
+              <a:t>Prepared policy, claim, feature, financial and report fields</a:t>
+            </a:r>
+          </a:p>
+        </p:txBody>
+      </p:sp>
+      <p:sp>
+        <p:nvSpPr>
+          <p:cNvPr id="23" name="TextBox 22"/>
+          <p:cNvSpPr txBox="1"/>
+          <p:nvPr/>
+        </p:nvSpPr>
+        <p:spPr>
+          <a:xfrm>
+            <a:off x="6473952" y="4462272"/>
+            <a:ext cx="731520" cy="228600"/>
+          </a:xfrm>
+          <a:prstGeom prst="rect">
+            <a:avLst/>
+          </a:prstGeom>
+          <a:noFill/>
+        </p:spPr>
+        <p:txBody>
+          <a:bodyPr wrap="none" lIns="25400" rIns="25400" tIns="12700" bIns="12700" anchor="t">
+            <a:spAutoFit/>
+          </a:bodyPr>
+          <a:lstStyle/>
+          <a:p>
+            <a:pPr algn="l"/>
+            <a:r>
+              <a:rPr sz="1100" b="1">
+                <a:solidFill>
+                  <a:srgbClr val="DD3A05"/>
+                </a:solidFill>
+                <a:latin typeface="Aptos"/>
+              </a:rPr>
+              <a:t>Used for</a:t>
+            </a:r>
+          </a:p>
+        </p:txBody>
+      </p:sp>
+      <p:sp>
+        <p:nvSpPr>
+          <p:cNvPr id="24" name="TextBox 23"/>
+          <p:cNvSpPr txBox="1"/>
+          <p:nvPr/>
+        </p:nvSpPr>
+        <p:spPr>
+          <a:xfrm>
+            <a:off x="7242048" y="4434840"/>
+            <a:ext cx="3931920" cy="475488"/>
+          </a:xfrm>
+          <a:prstGeom prst="rect">
+            <a:avLst/>
+          </a:prstGeom>
+          <a:noFill/>
+        </p:spPr>
+        <p:txBody>
+          <a:bodyPr wrap="none" lIns="25400" rIns="25400" tIns="12700" bIns="12700" anchor="t">
+            <a:spAutoFit/>
+          </a:bodyPr>
+          <a:lstStyle/>
+          <a:p>
+            <a:pPr algn="l"/>
+            <a:r>
+              <a:rPr sz="1300" b="0">
+                <a:solidFill>
+                  <a:srgbClr val="252D36"/>
+                </a:solidFill>
+                <a:latin typeface="Aptos"/>
+              </a:rPr>
+              <a:t>Filtered in Python by customer, then written into Excel</a:t>
+            </a:r>
+          </a:p>
+        </p:txBody>
+      </p:sp>
+      <p:sp>
+        <p:nvSpPr>
+          <p:cNvPr id="25" name="Rounded Rectangle 24"/>
           <p:cNvSpPr/>
           <p:nvPr/>
         </p:nvSpPr>
         <p:spPr>
           <a:xfrm>
-            <a:off x="1920240" y="5148072"/>
-            <a:ext cx="8366760" cy="658368"/>
+            <a:off x="1078992" y="5285232"/>
+            <a:ext cx="10040112" cy="640080"/>
           </a:xfrm>
           <a:prstGeom prst="roundRect">
             <a:avLst/>
@@ -7269,20 +7318,20 @@
           <a:p>
             <a:pPr algn="ctr"/>
             <a:r>
-              <a:rPr sz="1700" b="1">
+              <a:rPr sz="1500" b="1">
                 <a:solidFill>
                   <a:srgbClr val="2F2F2F"/>
                 </a:solidFill>
                 <a:latin typeface="Aptos"/>
               </a:rPr>
-              <a:t>The complex calculations are inside the view—not recreated by the notebook.</a:t>
-            </a:r>
-          </a:p>
-        </p:txBody>
-      </p:sp>
-      <p:sp>
-        <p:nvSpPr>
-          <p:cNvPr id="22" name="TextBox 21"/>
+              <a:t>Important: the notebook loads the complete view result; the proposed UI flow could query only the selected customer.</a:t>
+            </a:r>
+          </a:p>
+        </p:txBody>
+      </p:sp>
+      <p:sp>
+        <p:nvSpPr>
+          <p:cNvPr id="26" name="TextBox 25"/>
           <p:cNvSpPr txBox="1"/>
           <p:nvPr/>
         </p:nvSpPr>
@@ -7317,7 +7366,7 @@
       </p:sp>
       <p:sp>
         <p:nvSpPr>
-          <p:cNvPr id="23" name="TextBox 22"/>
+          <p:cNvPr id="27" name="TextBox 26"/>
           <p:cNvSpPr txBox="1"/>
           <p:nvPr/>
         </p:nvSpPr>
@@ -8235,7 +8284,7 @@
                 </a:solidFill>
                 <a:latin typeface="Aptos"/>
               </a:rPr>
-              <a:t>How the current workbook is produced</a:t>
+              <a:t>How the notebook turns view data into a workbook</a:t>
             </a:r>
           </a:p>
         </p:txBody>
@@ -8291,982 +8340,14 @@
         </p:nvSpPr>
         <p:spPr>
           <a:xfrm>
-            <a:off x="1170432" y="1508760"/>
-            <a:ext cx="438912" cy="438912"/>
+            <a:off x="658368" y="1389888"/>
+            <a:ext cx="475488" cy="475488"/>
           </a:xfrm>
           <a:prstGeom prst="roundRect">
             <a:avLst/>
           </a:prstGeom>
           <a:solidFill>
-            <a:srgbClr val="DD3A05"/>
-          </a:solidFill>
-          <a:ln w="15240">
-            <a:solidFill>
-              <a:srgbClr val="DD3A05"/>
-            </a:solidFill>
-          </a:ln>
-        </p:spPr>
-        <p:style>
-          <a:lnRef idx="1">
-            <a:schemeClr val="accent1"/>
-          </a:lnRef>
-          <a:fillRef idx="3">
-            <a:schemeClr val="accent1"/>
-          </a:fillRef>
-          <a:effectRef idx="2">
-            <a:schemeClr val="accent1"/>
-          </a:effectRef>
-          <a:fontRef idx="minor">
-            <a:schemeClr val="lt1"/>
-          </a:fontRef>
-        </p:style>
-        <p:txBody>
-          <a:bodyPr rtlCol="0" anchor="ctr" lIns="109728" rIns="109728"/>
-          <a:lstStyle/>
-          <a:p>
-            <a:pPr algn="ctr"/>
-            <a:r>
-              <a:rPr sz="1400" b="1">
-                <a:solidFill>
-                  <a:srgbClr val="FFFFFF"/>
-                </a:solidFill>
-                <a:latin typeface="Aptos"/>
-              </a:rPr>
-              <a:t>1</a:t>
-            </a:r>
-          </a:p>
-        </p:txBody>
-      </p:sp>
-      <p:sp>
-        <p:nvSpPr>
-          <p:cNvPr id="6" name="Rounded Rectangle 5"/>
-          <p:cNvSpPr/>
-          <p:nvPr/>
-        </p:nvSpPr>
-        <p:spPr>
-          <a:xfrm>
-            <a:off x="594360" y="2057400"/>
-            <a:ext cx="1600200" cy="868680"/>
-          </a:xfrm>
-          <a:prstGeom prst="roundRect">
-            <a:avLst/>
-          </a:prstGeom>
-          <a:solidFill>
-            <a:srgbClr val="F4F6F8"/>
-          </a:solidFill>
-          <a:ln w="15240">
-            <a:solidFill>
-              <a:srgbClr val="D3DAE1"/>
-            </a:solidFill>
-          </a:ln>
-        </p:spPr>
-        <p:style>
-          <a:lnRef idx="1">
-            <a:schemeClr val="accent1"/>
-          </a:lnRef>
-          <a:fillRef idx="3">
-            <a:schemeClr val="accent1"/>
-          </a:fillRef>
-          <a:effectRef idx="2">
-            <a:schemeClr val="accent1"/>
-          </a:effectRef>
-          <a:fontRef idx="minor">
-            <a:schemeClr val="lt1"/>
-          </a:fontRef>
-        </p:style>
-        <p:txBody>
-          <a:bodyPr rtlCol="0" anchor="ctr" lIns="109728" rIns="109728"/>
-          <a:lstStyle/>
-          <a:p>
-            <a:pPr algn="ctr"/>
-            <a:r>
-              <a:rPr sz="1300" b="1">
-                <a:solidFill>
-                  <a:srgbClr val="2F2F2F"/>
-                </a:solidFill>
-                <a:latin typeface="Aptos"/>
-              </a:rPr>
-              <a:t>Select customer rows</a:t>
-            </a:r>
-          </a:p>
-        </p:txBody>
-      </p:sp>
-      <p:sp>
-        <p:nvSpPr>
-          <p:cNvPr id="7" name="Right Arrow 6"/>
-          <p:cNvSpPr/>
-          <p:nvPr/>
-        </p:nvSpPr>
-        <p:spPr>
-          <a:xfrm>
-            <a:off x="2231136" y="2322576"/>
-            <a:ext cx="246888" cy="219456"/>
-          </a:xfrm>
-          <a:prstGeom prst="rightArrow">
-            <a:avLst/>
-          </a:prstGeom>
-          <a:solidFill>
-            <a:srgbClr val="FF8936"/>
-          </a:solidFill>
-          <a:ln>
-            <a:noFill/>
-          </a:ln>
-        </p:spPr>
-        <p:style>
-          <a:lnRef idx="1">
-            <a:schemeClr val="accent1"/>
-          </a:lnRef>
-          <a:fillRef idx="3">
-            <a:schemeClr val="accent1"/>
-          </a:fillRef>
-          <a:effectRef idx="2">
-            <a:schemeClr val="accent1"/>
-          </a:effectRef>
-          <a:fontRef idx="minor">
-            <a:schemeClr val="lt1"/>
-          </a:fontRef>
-        </p:style>
-        <p:txBody>
-          <a:bodyPr rtlCol="0" anchor="ctr"/>
-          <a:lstStyle/>
-          <a:p>
-            <a:pPr algn="ctr"/>
-          </a:p>
-        </p:txBody>
-      </p:sp>
-      <p:sp>
-        <p:nvSpPr>
-          <p:cNvPr id="8" name="Rounded Rectangle 7"/>
-          <p:cNvSpPr/>
-          <p:nvPr/>
-        </p:nvSpPr>
-        <p:spPr>
-          <a:xfrm>
-            <a:off x="3090672" y="1508760"/>
-            <a:ext cx="438912" cy="438912"/>
-          </a:xfrm>
-          <a:prstGeom prst="roundRect">
-            <a:avLst/>
-          </a:prstGeom>
-          <a:solidFill>
-            <a:srgbClr val="DD3A05"/>
-          </a:solidFill>
-          <a:ln w="15240">
-            <a:solidFill>
-              <a:srgbClr val="DD3A05"/>
-            </a:solidFill>
-          </a:ln>
-        </p:spPr>
-        <p:style>
-          <a:lnRef idx="1">
-            <a:schemeClr val="accent1"/>
-          </a:lnRef>
-          <a:fillRef idx="3">
-            <a:schemeClr val="accent1"/>
-          </a:fillRef>
-          <a:effectRef idx="2">
-            <a:schemeClr val="accent1"/>
-          </a:effectRef>
-          <a:fontRef idx="minor">
-            <a:schemeClr val="lt1"/>
-          </a:fontRef>
-        </p:style>
-        <p:txBody>
-          <a:bodyPr rtlCol="0" anchor="ctr" lIns="109728" rIns="109728"/>
-          <a:lstStyle/>
-          <a:p>
-            <a:pPr algn="ctr"/>
-            <a:r>
-              <a:rPr sz="1400" b="1">
-                <a:solidFill>
-                  <a:srgbClr val="FFFFFF"/>
-                </a:solidFill>
-                <a:latin typeface="Aptos"/>
-              </a:rPr>
-              <a:t>2</a:t>
-            </a:r>
-          </a:p>
-        </p:txBody>
-      </p:sp>
-      <p:sp>
-        <p:nvSpPr>
-          <p:cNvPr id="9" name="Rounded Rectangle 8"/>
-          <p:cNvSpPr/>
-          <p:nvPr/>
-        </p:nvSpPr>
-        <p:spPr>
-          <a:xfrm>
-            <a:off x="2514600" y="2057400"/>
-            <a:ext cx="1600200" cy="868680"/>
-          </a:xfrm>
-          <a:prstGeom prst="roundRect">
-            <a:avLst/>
-          </a:prstGeom>
-          <a:solidFill>
-            <a:srgbClr val="F4F6F8"/>
-          </a:solidFill>
-          <a:ln w="15240">
-            <a:solidFill>
-              <a:srgbClr val="D3DAE1"/>
-            </a:solidFill>
-          </a:ln>
-        </p:spPr>
-        <p:style>
-          <a:lnRef idx="1">
-            <a:schemeClr val="accent1"/>
-          </a:lnRef>
-          <a:fillRef idx="3">
-            <a:schemeClr val="accent1"/>
-          </a:fillRef>
-          <a:effectRef idx="2">
-            <a:schemeClr val="accent1"/>
-          </a:effectRef>
-          <a:fontRef idx="minor">
-            <a:schemeClr val="lt1"/>
-          </a:fontRef>
-        </p:style>
-        <p:txBody>
-          <a:bodyPr rtlCol="0" anchor="ctr" lIns="109728" rIns="109728"/>
-          <a:lstStyle/>
-          <a:p>
-            <a:pPr algn="ctr"/>
-            <a:r>
-              <a:rPr sz="1300" b="1">
-                <a:solidFill>
-                  <a:srgbClr val="2F2F2F"/>
-                </a:solidFill>
-                <a:latin typeface="Aptos"/>
-              </a:rPr>
-              <a:t>Format identifiers</a:t>
-            </a:r>
-          </a:p>
-        </p:txBody>
-      </p:sp>
-      <p:sp>
-        <p:nvSpPr>
-          <p:cNvPr id="10" name="Right Arrow 9"/>
-          <p:cNvSpPr/>
-          <p:nvPr/>
-        </p:nvSpPr>
-        <p:spPr>
-          <a:xfrm>
-            <a:off x="4151376" y="2322576"/>
-            <a:ext cx="246888" cy="219456"/>
-          </a:xfrm>
-          <a:prstGeom prst="rightArrow">
-            <a:avLst/>
-          </a:prstGeom>
-          <a:solidFill>
-            <a:srgbClr val="FF8936"/>
-          </a:solidFill>
-          <a:ln>
-            <a:noFill/>
-          </a:ln>
-        </p:spPr>
-        <p:style>
-          <a:lnRef idx="1">
-            <a:schemeClr val="accent1"/>
-          </a:lnRef>
-          <a:fillRef idx="3">
-            <a:schemeClr val="accent1"/>
-          </a:fillRef>
-          <a:effectRef idx="2">
-            <a:schemeClr val="accent1"/>
-          </a:effectRef>
-          <a:fontRef idx="minor">
-            <a:schemeClr val="lt1"/>
-          </a:fontRef>
-        </p:style>
-        <p:txBody>
-          <a:bodyPr rtlCol="0" anchor="ctr"/>
-          <a:lstStyle/>
-          <a:p>
-            <a:pPr algn="ctr"/>
-          </a:p>
-        </p:txBody>
-      </p:sp>
-      <p:sp>
-        <p:nvSpPr>
-          <p:cNvPr id="11" name="Rounded Rectangle 10"/>
-          <p:cNvSpPr/>
-          <p:nvPr/>
-        </p:nvSpPr>
-        <p:spPr>
-          <a:xfrm>
-            <a:off x="5010912" y="1508760"/>
-            <a:ext cx="438912" cy="438912"/>
-          </a:xfrm>
-          <a:prstGeom prst="roundRect">
-            <a:avLst/>
-          </a:prstGeom>
-          <a:solidFill>
-            <a:srgbClr val="DD3A05"/>
-          </a:solidFill>
-          <a:ln w="15240">
-            <a:solidFill>
-              <a:srgbClr val="DD3A05"/>
-            </a:solidFill>
-          </a:ln>
-        </p:spPr>
-        <p:style>
-          <a:lnRef idx="1">
-            <a:schemeClr val="accent1"/>
-          </a:lnRef>
-          <a:fillRef idx="3">
-            <a:schemeClr val="accent1"/>
-          </a:fillRef>
-          <a:effectRef idx="2">
-            <a:schemeClr val="accent1"/>
-          </a:effectRef>
-          <a:fontRef idx="minor">
-            <a:schemeClr val="lt1"/>
-          </a:fontRef>
-        </p:style>
-        <p:txBody>
-          <a:bodyPr rtlCol="0" anchor="ctr" lIns="109728" rIns="109728"/>
-          <a:lstStyle/>
-          <a:p>
-            <a:pPr algn="ctr"/>
-            <a:r>
-              <a:rPr sz="1400" b="1">
-                <a:solidFill>
-                  <a:srgbClr val="FFFFFF"/>
-                </a:solidFill>
-                <a:latin typeface="Aptos"/>
-              </a:rPr>
-              <a:t>3</a:t>
-            </a:r>
-          </a:p>
-        </p:txBody>
-      </p:sp>
-      <p:sp>
-        <p:nvSpPr>
-          <p:cNvPr id="12" name="Rounded Rectangle 11"/>
-          <p:cNvSpPr/>
-          <p:nvPr/>
-        </p:nvSpPr>
-        <p:spPr>
-          <a:xfrm>
-            <a:off x="4434840" y="2057400"/>
-            <a:ext cx="1600200" cy="868680"/>
-          </a:xfrm>
-          <a:prstGeom prst="roundRect">
-            <a:avLst/>
-          </a:prstGeom>
-          <a:solidFill>
-            <a:srgbClr val="F4F6F8"/>
-          </a:solidFill>
-          <a:ln w="15240">
-            <a:solidFill>
-              <a:srgbClr val="D3DAE1"/>
-            </a:solidFill>
-          </a:ln>
-        </p:spPr>
-        <p:style>
-          <a:lnRef idx="1">
-            <a:schemeClr val="accent1"/>
-          </a:lnRef>
-          <a:fillRef idx="3">
-            <a:schemeClr val="accent1"/>
-          </a:fillRef>
-          <a:effectRef idx="2">
-            <a:schemeClr val="accent1"/>
-          </a:effectRef>
-          <a:fontRef idx="minor">
-            <a:schemeClr val="lt1"/>
-          </a:fontRef>
-        </p:style>
-        <p:txBody>
-          <a:bodyPr rtlCol="0" anchor="ctr" lIns="109728" rIns="109728"/>
-          <a:lstStyle/>
-          <a:p>
-            <a:pPr algn="ctr"/>
-            <a:r>
-              <a:rPr sz="1300" b="1">
-                <a:solidFill>
-                  <a:srgbClr val="2F2F2F"/>
-                </a:solidFill>
-                <a:latin typeface="Aptos"/>
-              </a:rPr>
-              <a:t>Split claims / record only</a:t>
-            </a:r>
-          </a:p>
-        </p:txBody>
-      </p:sp>
-      <p:sp>
-        <p:nvSpPr>
-          <p:cNvPr id="13" name="Right Arrow 12"/>
-          <p:cNvSpPr/>
-          <p:nvPr/>
-        </p:nvSpPr>
-        <p:spPr>
-          <a:xfrm>
-            <a:off x="6071616" y="2322576"/>
-            <a:ext cx="246888" cy="219456"/>
-          </a:xfrm>
-          <a:prstGeom prst="rightArrow">
-            <a:avLst/>
-          </a:prstGeom>
-          <a:solidFill>
-            <a:srgbClr val="FF8936"/>
-          </a:solidFill>
-          <a:ln>
-            <a:noFill/>
-          </a:ln>
-        </p:spPr>
-        <p:style>
-          <a:lnRef idx="1">
-            <a:schemeClr val="accent1"/>
-          </a:lnRef>
-          <a:fillRef idx="3">
-            <a:schemeClr val="accent1"/>
-          </a:fillRef>
-          <a:effectRef idx="2">
-            <a:schemeClr val="accent1"/>
-          </a:effectRef>
-          <a:fontRef idx="minor">
-            <a:schemeClr val="lt1"/>
-          </a:fontRef>
-        </p:style>
-        <p:txBody>
-          <a:bodyPr rtlCol="0" anchor="ctr"/>
-          <a:lstStyle/>
-          <a:p>
-            <a:pPr algn="ctr"/>
-          </a:p>
-        </p:txBody>
-      </p:sp>
-      <p:sp>
-        <p:nvSpPr>
-          <p:cNvPr id="14" name="Rounded Rectangle 13"/>
-          <p:cNvSpPr/>
-          <p:nvPr/>
-        </p:nvSpPr>
-        <p:spPr>
-          <a:xfrm>
-            <a:off x="6931152" y="1508760"/>
-            <a:ext cx="438912" cy="438912"/>
-          </a:xfrm>
-          <a:prstGeom prst="roundRect">
-            <a:avLst/>
-          </a:prstGeom>
-          <a:solidFill>
-            <a:srgbClr val="DD3A05"/>
-          </a:solidFill>
-          <a:ln w="15240">
-            <a:solidFill>
-              <a:srgbClr val="DD3A05"/>
-            </a:solidFill>
-          </a:ln>
-        </p:spPr>
-        <p:style>
-          <a:lnRef idx="1">
-            <a:schemeClr val="accent1"/>
-          </a:lnRef>
-          <a:fillRef idx="3">
-            <a:schemeClr val="accent1"/>
-          </a:fillRef>
-          <a:effectRef idx="2">
-            <a:schemeClr val="accent1"/>
-          </a:effectRef>
-          <a:fontRef idx="minor">
-            <a:schemeClr val="lt1"/>
-          </a:fontRef>
-        </p:style>
-        <p:txBody>
-          <a:bodyPr rtlCol="0" anchor="ctr" lIns="109728" rIns="109728"/>
-          <a:lstStyle/>
-          <a:p>
-            <a:pPr algn="ctr"/>
-            <a:r>
-              <a:rPr sz="1400" b="1">
-                <a:solidFill>
-                  <a:srgbClr val="FFFFFF"/>
-                </a:solidFill>
-                <a:latin typeface="Aptos"/>
-              </a:rPr>
-              <a:t>4</a:t>
-            </a:r>
-          </a:p>
-        </p:txBody>
-      </p:sp>
-      <p:sp>
-        <p:nvSpPr>
-          <p:cNvPr id="15" name="Rounded Rectangle 14"/>
-          <p:cNvSpPr/>
-          <p:nvPr/>
-        </p:nvSpPr>
-        <p:spPr>
-          <a:xfrm>
-            <a:off x="6355080" y="2057400"/>
-            <a:ext cx="1600200" cy="868680"/>
-          </a:xfrm>
-          <a:prstGeom prst="roundRect">
-            <a:avLst/>
-          </a:prstGeom>
-          <a:solidFill>
-            <a:srgbClr val="F4F6F8"/>
-          </a:solidFill>
-          <a:ln w="15240">
-            <a:solidFill>
-              <a:srgbClr val="D3DAE1"/>
-            </a:solidFill>
-          </a:ln>
-        </p:spPr>
-        <p:style>
-          <a:lnRef idx="1">
-            <a:schemeClr val="accent1"/>
-          </a:lnRef>
-          <a:fillRef idx="3">
-            <a:schemeClr val="accent1"/>
-          </a:fillRef>
-          <a:effectRef idx="2">
-            <a:schemeClr val="accent1"/>
-          </a:effectRef>
-          <a:fontRef idx="minor">
-            <a:schemeClr val="lt1"/>
-          </a:fontRef>
-        </p:style>
-        <p:txBody>
-          <a:bodyPr rtlCol="0" anchor="ctr" lIns="109728" rIns="109728"/>
-          <a:lstStyle/>
-          <a:p>
-            <a:pPr algn="ctr"/>
-            <a:r>
-              <a:rPr sz="1300" b="1">
-                <a:solidFill>
-                  <a:srgbClr val="2F2F2F"/>
-                </a:solidFill>
-                <a:latin typeface="Aptos"/>
-              </a:rPr>
-              <a:t>Fill Excel template</a:t>
-            </a:r>
-          </a:p>
-        </p:txBody>
-      </p:sp>
-      <p:sp>
-        <p:nvSpPr>
-          <p:cNvPr id="16" name="Right Arrow 15"/>
-          <p:cNvSpPr/>
-          <p:nvPr/>
-        </p:nvSpPr>
-        <p:spPr>
-          <a:xfrm>
-            <a:off x="7991856" y="2322576"/>
-            <a:ext cx="246888" cy="219456"/>
-          </a:xfrm>
-          <a:prstGeom prst="rightArrow">
-            <a:avLst/>
-          </a:prstGeom>
-          <a:solidFill>
-            <a:srgbClr val="FF8936"/>
-          </a:solidFill>
-          <a:ln>
-            <a:noFill/>
-          </a:ln>
-        </p:spPr>
-        <p:style>
-          <a:lnRef idx="1">
-            <a:schemeClr val="accent1"/>
-          </a:lnRef>
-          <a:fillRef idx="3">
-            <a:schemeClr val="accent1"/>
-          </a:fillRef>
-          <a:effectRef idx="2">
-            <a:schemeClr val="accent1"/>
-          </a:effectRef>
-          <a:fontRef idx="minor">
-            <a:schemeClr val="lt1"/>
-          </a:fontRef>
-        </p:style>
-        <p:txBody>
-          <a:bodyPr rtlCol="0" anchor="ctr"/>
-          <a:lstStyle/>
-          <a:p>
-            <a:pPr algn="ctr"/>
-          </a:p>
-        </p:txBody>
-      </p:sp>
-      <p:sp>
-        <p:nvSpPr>
-          <p:cNvPr id="17" name="Rounded Rectangle 16"/>
-          <p:cNvSpPr/>
-          <p:nvPr/>
-        </p:nvSpPr>
-        <p:spPr>
-          <a:xfrm>
-            <a:off x="8851392" y="1508760"/>
-            <a:ext cx="438912" cy="438912"/>
-          </a:xfrm>
-          <a:prstGeom prst="roundRect">
-            <a:avLst/>
-          </a:prstGeom>
-          <a:solidFill>
-            <a:srgbClr val="DD3A05"/>
-          </a:solidFill>
-          <a:ln w="15240">
-            <a:solidFill>
-              <a:srgbClr val="DD3A05"/>
-            </a:solidFill>
-          </a:ln>
-        </p:spPr>
-        <p:style>
-          <a:lnRef idx="1">
-            <a:schemeClr val="accent1"/>
-          </a:lnRef>
-          <a:fillRef idx="3">
-            <a:schemeClr val="accent1"/>
-          </a:fillRef>
-          <a:effectRef idx="2">
-            <a:schemeClr val="accent1"/>
-          </a:effectRef>
-          <a:fontRef idx="minor">
-            <a:schemeClr val="lt1"/>
-          </a:fontRef>
-        </p:style>
-        <p:txBody>
-          <a:bodyPr rtlCol="0" anchor="ctr" lIns="109728" rIns="109728"/>
-          <a:lstStyle/>
-          <a:p>
-            <a:pPr algn="ctr"/>
-            <a:r>
-              <a:rPr sz="1400" b="1">
-                <a:solidFill>
-                  <a:srgbClr val="FFFFFF"/>
-                </a:solidFill>
-                <a:latin typeface="Aptos"/>
-              </a:rPr>
-              <a:t>5</a:t>
-            </a:r>
-          </a:p>
-        </p:txBody>
-      </p:sp>
-      <p:sp>
-        <p:nvSpPr>
-          <p:cNvPr id="18" name="Rounded Rectangle 17"/>
-          <p:cNvSpPr/>
-          <p:nvPr/>
-        </p:nvSpPr>
-        <p:spPr>
-          <a:xfrm>
-            <a:off x="8275320" y="2057400"/>
-            <a:ext cx="1600200" cy="868680"/>
-          </a:xfrm>
-          <a:prstGeom prst="roundRect">
-            <a:avLst/>
-          </a:prstGeom>
-          <a:solidFill>
-            <a:srgbClr val="F4F6F8"/>
-          </a:solidFill>
-          <a:ln w="15240">
-            <a:solidFill>
-              <a:srgbClr val="D3DAE1"/>
-            </a:solidFill>
-          </a:ln>
-        </p:spPr>
-        <p:style>
-          <a:lnRef idx="1">
-            <a:schemeClr val="accent1"/>
-          </a:lnRef>
-          <a:fillRef idx="3">
-            <a:schemeClr val="accent1"/>
-          </a:fillRef>
-          <a:effectRef idx="2">
-            <a:schemeClr val="accent1"/>
-          </a:effectRef>
-          <a:fontRef idx="minor">
-            <a:schemeClr val="lt1"/>
-          </a:fontRef>
-        </p:style>
-        <p:txBody>
-          <a:bodyPr rtlCol="0" anchor="ctr" lIns="109728" rIns="109728"/>
-          <a:lstStyle/>
-          <a:p>
-            <a:pPr algn="ctr"/>
-            <a:r>
-              <a:rPr sz="1300" b="1">
-                <a:solidFill>
-                  <a:srgbClr val="2F2F2F"/>
-                </a:solidFill>
-                <a:latin typeface="Aptos"/>
-              </a:rPr>
-              <a:t>Set refresh on open</a:t>
-            </a:r>
-          </a:p>
-        </p:txBody>
-      </p:sp>
-      <p:sp>
-        <p:nvSpPr>
-          <p:cNvPr id="19" name="Right Arrow 18"/>
-          <p:cNvSpPr/>
-          <p:nvPr/>
-        </p:nvSpPr>
-        <p:spPr>
-          <a:xfrm>
-            <a:off x="9912096" y="2322576"/>
-            <a:ext cx="246888" cy="219456"/>
-          </a:xfrm>
-          <a:prstGeom prst="rightArrow">
-            <a:avLst/>
-          </a:prstGeom>
-          <a:solidFill>
-            <a:srgbClr val="FF8936"/>
-          </a:solidFill>
-          <a:ln>
-            <a:noFill/>
-          </a:ln>
-        </p:spPr>
-        <p:style>
-          <a:lnRef idx="1">
-            <a:schemeClr val="accent1"/>
-          </a:lnRef>
-          <a:fillRef idx="3">
-            <a:schemeClr val="accent1"/>
-          </a:fillRef>
-          <a:effectRef idx="2">
-            <a:schemeClr val="accent1"/>
-          </a:effectRef>
-          <a:fontRef idx="minor">
-            <a:schemeClr val="lt1"/>
-          </a:fontRef>
-        </p:style>
-        <p:txBody>
-          <a:bodyPr rtlCol="0" anchor="ctr"/>
-          <a:lstStyle/>
-          <a:p>
-            <a:pPr algn="ctr"/>
-          </a:p>
-        </p:txBody>
-      </p:sp>
-      <p:sp>
-        <p:nvSpPr>
-          <p:cNvPr id="20" name="Rounded Rectangle 19"/>
-          <p:cNvSpPr/>
-          <p:nvPr/>
-        </p:nvSpPr>
-        <p:spPr>
-          <a:xfrm>
-            <a:off x="10771632" y="1508760"/>
-            <a:ext cx="438912" cy="438912"/>
-          </a:xfrm>
-          <a:prstGeom prst="roundRect">
-            <a:avLst/>
-          </a:prstGeom>
-          <a:solidFill>
-            <a:srgbClr val="DD3A05"/>
-          </a:solidFill>
-          <a:ln w="15240">
-            <a:solidFill>
-              <a:srgbClr val="DD3A05"/>
-            </a:solidFill>
-          </a:ln>
-        </p:spPr>
-        <p:style>
-          <a:lnRef idx="1">
-            <a:schemeClr val="accent1"/>
-          </a:lnRef>
-          <a:fillRef idx="3">
-            <a:schemeClr val="accent1"/>
-          </a:fillRef>
-          <a:effectRef idx="2">
-            <a:schemeClr val="accent1"/>
-          </a:effectRef>
-          <a:fontRef idx="minor">
-            <a:schemeClr val="lt1"/>
-          </a:fontRef>
-        </p:style>
-        <p:txBody>
-          <a:bodyPr rtlCol="0" anchor="ctr" lIns="109728" rIns="109728"/>
-          <a:lstStyle/>
-          <a:p>
-            <a:pPr algn="ctr"/>
-            <a:r>
-              <a:rPr sz="1400" b="1">
-                <a:solidFill>
-                  <a:srgbClr val="FFFFFF"/>
-                </a:solidFill>
-                <a:latin typeface="Aptos"/>
-              </a:rPr>
-              <a:t>6</a:t>
-            </a:r>
-          </a:p>
-        </p:txBody>
-      </p:sp>
-      <p:sp>
-        <p:nvSpPr>
-          <p:cNvPr id="21" name="Rounded Rectangle 20"/>
-          <p:cNvSpPr/>
-          <p:nvPr/>
-        </p:nvSpPr>
-        <p:spPr>
-          <a:xfrm>
-            <a:off x="10195560" y="2057400"/>
-            <a:ext cx="1600200" cy="868680"/>
-          </a:xfrm>
-          <a:prstGeom prst="roundRect">
-            <a:avLst/>
-          </a:prstGeom>
-          <a:solidFill>
-            <a:srgbClr val="F4F6F8"/>
-          </a:solidFill>
-          <a:ln w="15240">
-            <a:solidFill>
-              <a:srgbClr val="D3DAE1"/>
-            </a:solidFill>
-          </a:ln>
-        </p:spPr>
-        <p:style>
-          <a:lnRef idx="1">
-            <a:schemeClr val="accent1"/>
-          </a:lnRef>
-          <a:fillRef idx="3">
-            <a:schemeClr val="accent1"/>
-          </a:fillRef>
-          <a:effectRef idx="2">
-            <a:schemeClr val="accent1"/>
-          </a:effectRef>
-          <a:fontRef idx="minor">
-            <a:schemeClr val="lt1"/>
-          </a:fontRef>
-        </p:style>
-        <p:txBody>
-          <a:bodyPr rtlCol="0" anchor="ctr" lIns="109728" rIns="109728"/>
-          <a:lstStyle/>
-          <a:p>
-            <a:pPr algn="ctr"/>
-            <a:r>
-              <a:rPr sz="1300" b="1">
-                <a:solidFill>
-                  <a:srgbClr val="2F2F2F"/>
-                </a:solidFill>
-                <a:latin typeface="Aptos"/>
-              </a:rPr>
-              <a:t>Save customer workbook</a:t>
-            </a:r>
-          </a:p>
-        </p:txBody>
-      </p:sp>
-      <p:sp>
-        <p:nvSpPr>
-          <p:cNvPr id="22" name="TextBox 21"/>
-          <p:cNvSpPr txBox="1"/>
-          <p:nvPr/>
-        </p:nvSpPr>
-        <p:spPr>
-          <a:xfrm>
-            <a:off x="685800" y="3502152"/>
-            <a:ext cx="1828800" cy="274320"/>
-          </a:xfrm>
-          <a:prstGeom prst="rect">
-            <a:avLst/>
-          </a:prstGeom>
-          <a:noFill/>
-        </p:spPr>
-        <p:txBody>
-          <a:bodyPr wrap="none" lIns="25400" rIns="25400" tIns="12700" bIns="12700" anchor="t">
-            <a:spAutoFit/>
-          </a:bodyPr>
-          <a:lstStyle/>
-          <a:p>
-            <a:pPr algn="l"/>
-            <a:r>
-              <a:rPr sz="1400" b="1">
-                <a:solidFill>
-                  <a:srgbClr val="DD3A05"/>
-                </a:solidFill>
-                <a:latin typeface="Aptos"/>
-              </a:rPr>
-              <a:t>Current output</a:t>
-            </a:r>
-          </a:p>
-        </p:txBody>
-      </p:sp>
-      <p:sp>
-        <p:nvSpPr>
-          <p:cNvPr id="23" name="Rounded Rectangle 22"/>
-          <p:cNvSpPr/>
-          <p:nvPr/>
-        </p:nvSpPr>
-        <p:spPr>
-          <a:xfrm>
-            <a:off x="685800" y="3913632"/>
-            <a:ext cx="2834640" cy="1325880"/>
-          </a:xfrm>
-          <a:prstGeom prst="roundRect">
-            <a:avLst/>
-          </a:prstGeom>
-          <a:solidFill>
-            <a:srgbClr val="FFF3E9"/>
-          </a:solidFill>
-          <a:ln w="15240">
-            <a:solidFill>
-              <a:srgbClr val="FF8936"/>
-            </a:solidFill>
-          </a:ln>
-        </p:spPr>
-        <p:style>
-          <a:lnRef idx="1">
-            <a:schemeClr val="accent1"/>
-          </a:lnRef>
-          <a:fillRef idx="3">
-            <a:schemeClr val="accent1"/>
-          </a:fillRef>
-          <a:effectRef idx="2">
-            <a:schemeClr val="accent1"/>
-          </a:effectRef>
-          <a:fontRef idx="minor">
-            <a:schemeClr val="lt1"/>
-          </a:fontRef>
-        </p:style>
-        <p:txBody>
-          <a:bodyPr rtlCol="0" anchor="ctr" lIns="109728" rIns="109728"/>
-          <a:lstStyle/>
-          <a:p>
-            <a:pPr algn="ctr"/>
-            <a:r>
-              <a:rPr sz="2000" b="1">
-                <a:solidFill>
-                  <a:srgbClr val="2F2F2F"/>
-                </a:solidFill>
-                <a:latin typeface="Aptos"/>
-              </a:rPr>
-              <a:t>Microsoft Excel (.xlsx)</a:t>
-            </a:r>
-          </a:p>
-          <a:p>
-            <a:pPr algn="ctr">
-              <a:spcBef>
-                <a:spcPts val="500"/>
-              </a:spcBef>
-            </a:pPr>
-            <a:r>
-              <a:rPr sz="1500">
-                <a:solidFill>
-                  <a:srgbClr val="2F2F2F"/>
-                </a:solidFill>
-                <a:latin typeface="Aptos"/>
-              </a:rPr>
-              <a:t>One workbook per qualifying customer</a:t>
-            </a:r>
-          </a:p>
-        </p:txBody>
-      </p:sp>
-      <p:sp>
-        <p:nvSpPr>
-          <p:cNvPr id="24" name="Rounded Rectangle 23"/>
-          <p:cNvSpPr/>
-          <p:nvPr/>
-        </p:nvSpPr>
-        <p:spPr>
-          <a:xfrm>
-            <a:off x="3767328" y="3913632"/>
-            <a:ext cx="3520440" cy="1325880"/>
-          </a:xfrm>
-          <a:prstGeom prst="roundRect">
-            <a:avLst/>
-          </a:prstGeom>
-          <a:solidFill>
-            <a:srgbClr val="FFEFE7"/>
+            <a:srgbClr val="FF4B0A"/>
           </a:solidFill>
           <a:ln w="15240">
             <a:solidFill>
@@ -9294,53 +8375,107 @@
           <a:p>
             <a:pPr algn="ctr"/>
             <a:r>
-              <a:rPr sz="2000" b="1">
+              <a:rPr sz="1500" b="1">
+                <a:solidFill>
+                  <a:srgbClr val="FFFFFF"/>
+                </a:solidFill>
+                <a:latin typeface="Aptos"/>
+              </a:rPr>
+              <a:t>1</a:t>
+            </a:r>
+          </a:p>
+        </p:txBody>
+      </p:sp>
+      <p:sp>
+        <p:nvSpPr>
+          <p:cNvPr id="6" name="TextBox 5"/>
+          <p:cNvSpPr txBox="1"/>
+          <p:nvPr/>
+        </p:nvSpPr>
+        <p:spPr>
+          <a:xfrm>
+            <a:off x="1298448" y="1380744"/>
+            <a:ext cx="2788920" cy="274320"/>
+          </a:xfrm>
+          <a:prstGeom prst="rect">
+            <a:avLst/>
+          </a:prstGeom>
+          <a:noFill/>
+        </p:spPr>
+        <p:txBody>
+          <a:bodyPr wrap="none" lIns="25400" rIns="25400" tIns="12700" bIns="12700" anchor="t">
+            <a:spAutoFit/>
+          </a:bodyPr>
+          <a:lstStyle/>
+          <a:p>
+            <a:pPr algn="l"/>
+            <a:r>
+              <a:rPr sz="1600" b="1">
                 <a:solidFill>
                   <a:srgbClr val="2F2F2F"/>
                 </a:solidFill>
                 <a:latin typeface="Aptos"/>
               </a:rPr>
-              <a:t>Workbook structure</a:t>
-            </a:r>
-          </a:p>
-          <a:p>
-            <a:pPr algn="ctr">
-              <a:spcBef>
-                <a:spcPts val="500"/>
-              </a:spcBef>
-            </a:pPr>
-            <a:r>
-              <a:rPr sz="1500">
-                <a:solidFill>
-                  <a:srgbClr val="2F2F2F"/>
-                </a:solidFill>
-                <a:latin typeface="Aptos"/>
-              </a:rPr>
-              <a:t>Cover Page • Claims Data • Record Only</a:t>
-            </a:r>
-          </a:p>
-        </p:txBody>
-      </p:sp>
-      <p:sp>
-        <p:nvSpPr>
-          <p:cNvPr id="25" name="Rounded Rectangle 24"/>
+              <a:t>Customer selection</a:t>
+            </a:r>
+          </a:p>
+        </p:txBody>
+      </p:sp>
+      <p:sp>
+        <p:nvSpPr>
+          <p:cNvPr id="7" name="TextBox 6"/>
+          <p:cNvSpPr txBox="1"/>
+          <p:nvPr/>
+        </p:nvSpPr>
+        <p:spPr>
+          <a:xfrm>
+            <a:off x="1298448" y="1783080"/>
+            <a:ext cx="2834640" cy="658368"/>
+          </a:xfrm>
+          <a:prstGeom prst="rect">
+            <a:avLst/>
+          </a:prstGeom>
+          <a:noFill/>
+        </p:spPr>
+        <p:txBody>
+          <a:bodyPr wrap="none" lIns="25400" rIns="25400" tIns="12700" bIns="12700" anchor="t">
+            <a:spAutoFit/>
+          </a:bodyPr>
+          <a:lstStyle/>
+          <a:p>
+            <a:pPr algn="l"/>
+            <a:r>
+              <a:rPr sz="1200" b="0">
+                <a:solidFill>
+                  <a:srgbClr val="252D36"/>
+                </a:solidFill>
+                <a:latin typeface="Aptos"/>
+              </a:rPr>
+              <a:t>Keeps only rows belonging to the current customer.</a:t>
+            </a:r>
+          </a:p>
+        </p:txBody>
+      </p:sp>
+      <p:sp>
+        <p:nvSpPr>
+          <p:cNvPr id="8" name="Rounded Rectangle 7"/>
           <p:cNvSpPr/>
           <p:nvPr/>
         </p:nvSpPr>
         <p:spPr>
           <a:xfrm>
-            <a:off x="7543800" y="3913632"/>
-            <a:ext cx="3931920" cy="1325880"/>
+            <a:off x="4498848" y="1389888"/>
+            <a:ext cx="475488" cy="475488"/>
           </a:xfrm>
           <a:prstGeom prst="roundRect">
             <a:avLst/>
           </a:prstGeom>
           <a:solidFill>
-            <a:srgbClr val="FFE5D9"/>
+            <a:srgbClr val="FF4B0A"/>
           </a:solidFill>
           <a:ln w="15240">
             <a:solidFill>
-              <a:srgbClr val="DD3A05"/>
+              <a:srgbClr val="FF4B0A"/>
             </a:solidFill>
           </a:ln>
         </p:spPr>
@@ -9364,43 +8499,27 @@
           <a:p>
             <a:pPr algn="ctr"/>
             <a:r>
-              <a:rPr sz="2000" b="1">
-                <a:solidFill>
-                  <a:srgbClr val="2F2F2F"/>
-                </a:solidFill>
-                <a:latin typeface="Aptos"/>
-              </a:rPr>
-              <a:t>Summary output</a:t>
-            </a:r>
-          </a:p>
-          <a:p>
-            <a:pPr algn="ctr">
-              <a:spcBef>
-                <a:spcPts val="500"/>
-              </a:spcBef>
-            </a:pPr>
-            <a:r>
-              <a:rPr sz="1500">
-                <a:solidFill>
-                  <a:srgbClr val="2F2F2F"/>
-                </a:solidFill>
-                <a:latin typeface="Aptos"/>
-              </a:rPr>
-              <a:t>Summary by Policy Year • Chart • refresh on open</a:t>
-            </a:r>
-          </a:p>
-        </p:txBody>
-      </p:sp>
-      <p:sp>
-        <p:nvSpPr>
-          <p:cNvPr id="26" name="TextBox 25"/>
+              <a:rPr sz="1500" b="1">
+                <a:solidFill>
+                  <a:srgbClr val="FFFFFF"/>
+                </a:solidFill>
+                <a:latin typeface="Aptos"/>
+              </a:rPr>
+              <a:t>2</a:t>
+            </a:r>
+          </a:p>
+        </p:txBody>
+      </p:sp>
+      <p:sp>
+        <p:nvSpPr>
+          <p:cNvPr id="9" name="TextBox 8"/>
           <p:cNvSpPr txBox="1"/>
           <p:nvPr/>
         </p:nvSpPr>
         <p:spPr>
           <a:xfrm>
-            <a:off x="713232" y="5687568"/>
-            <a:ext cx="8046720" cy="274320"/>
+            <a:off x="5138928" y="1380744"/>
+            <a:ext cx="2788920" cy="274320"/>
           </a:xfrm>
           <a:prstGeom prst="rect">
             <a:avLst/>
@@ -9415,13 +8534,703 @@
           <a:p>
             <a:pPr algn="l"/>
             <a:r>
+              <a:rPr sz="1600" b="1">
+                <a:solidFill>
+                  <a:srgbClr val="2F2F2F"/>
+                </a:solidFill>
+                <a:latin typeface="Aptos"/>
+              </a:rPr>
+              <a:t>Data formatting</a:t>
+            </a:r>
+          </a:p>
+        </p:txBody>
+      </p:sp>
+      <p:sp>
+        <p:nvSpPr>
+          <p:cNvPr id="10" name="TextBox 9"/>
+          <p:cNvSpPr txBox="1"/>
+          <p:nvPr/>
+        </p:nvSpPr>
+        <p:spPr>
+          <a:xfrm>
+            <a:off x="5138928" y="1783080"/>
+            <a:ext cx="2834640" cy="658368"/>
+          </a:xfrm>
+          <a:prstGeom prst="rect">
+            <a:avLst/>
+          </a:prstGeom>
+          <a:noFill/>
+        </p:spPr>
+        <p:txBody>
+          <a:bodyPr wrap="none" lIns="25400" rIns="25400" tIns="12700" bIns="12700" anchor="t">
+            <a:spAutoFit/>
+          </a:bodyPr>
+          <a:lstStyle/>
+          <a:p>
+            <a:pPr algn="l"/>
+            <a:r>
+              <a:rPr sz="1200" b="0">
+                <a:solidFill>
+                  <a:srgbClr val="252D36"/>
+                </a:solidFill>
+                <a:latin typeface="Aptos"/>
+              </a:rPr>
+              <a:t>Preserves identifiers and formats exposure values.</a:t>
+            </a:r>
+          </a:p>
+        </p:txBody>
+      </p:sp>
+      <p:sp>
+        <p:nvSpPr>
+          <p:cNvPr id="11" name="Rounded Rectangle 10"/>
+          <p:cNvSpPr/>
+          <p:nvPr/>
+        </p:nvSpPr>
+        <p:spPr>
+          <a:xfrm>
+            <a:off x="8339328" y="1389888"/>
+            <a:ext cx="475488" cy="475488"/>
+          </a:xfrm>
+          <a:prstGeom prst="roundRect">
+            <a:avLst/>
+          </a:prstGeom>
+          <a:solidFill>
+            <a:srgbClr val="FF4B0A"/>
+          </a:solidFill>
+          <a:ln w="15240">
+            <a:solidFill>
+              <a:srgbClr val="FF4B0A"/>
+            </a:solidFill>
+          </a:ln>
+        </p:spPr>
+        <p:style>
+          <a:lnRef idx="1">
+            <a:schemeClr val="accent1"/>
+          </a:lnRef>
+          <a:fillRef idx="3">
+            <a:schemeClr val="accent1"/>
+          </a:fillRef>
+          <a:effectRef idx="2">
+            <a:schemeClr val="accent1"/>
+          </a:effectRef>
+          <a:fontRef idx="minor">
+            <a:schemeClr val="lt1"/>
+          </a:fontRef>
+        </p:style>
+        <p:txBody>
+          <a:bodyPr rtlCol="0" anchor="ctr" lIns="109728" rIns="109728"/>
+          <a:lstStyle/>
+          <a:p>
+            <a:pPr algn="ctr"/>
+            <a:r>
+              <a:rPr sz="1500" b="1">
+                <a:solidFill>
+                  <a:srgbClr val="FFFFFF"/>
+                </a:solidFill>
+                <a:latin typeface="Aptos"/>
+              </a:rPr>
+              <a:t>3</a:t>
+            </a:r>
+          </a:p>
+        </p:txBody>
+      </p:sp>
+      <p:sp>
+        <p:nvSpPr>
+          <p:cNvPr id="12" name="TextBox 11"/>
+          <p:cNvSpPr txBox="1"/>
+          <p:nvPr/>
+        </p:nvSpPr>
+        <p:spPr>
+          <a:xfrm>
+            <a:off x="8979408" y="1380744"/>
+            <a:ext cx="2788920" cy="274320"/>
+          </a:xfrm>
+          <a:prstGeom prst="rect">
+            <a:avLst/>
+          </a:prstGeom>
+          <a:noFill/>
+        </p:spPr>
+        <p:txBody>
+          <a:bodyPr wrap="none" lIns="25400" rIns="25400" tIns="12700" bIns="12700" anchor="t">
+            <a:spAutoFit/>
+          </a:bodyPr>
+          <a:lstStyle/>
+          <a:p>
+            <a:pPr algn="l"/>
+            <a:r>
+              <a:rPr sz="1600" b="1">
+                <a:solidFill>
+                  <a:srgbClr val="2F2F2F"/>
+                </a:solidFill>
+                <a:latin typeface="Aptos"/>
+              </a:rPr>
+              <a:t>Report separation</a:t>
+            </a:r>
+          </a:p>
+        </p:txBody>
+      </p:sp>
+      <p:sp>
+        <p:nvSpPr>
+          <p:cNvPr id="13" name="TextBox 12"/>
+          <p:cNvSpPr txBox="1"/>
+          <p:nvPr/>
+        </p:nvSpPr>
+        <p:spPr>
+          <a:xfrm>
+            <a:off x="8979408" y="1783080"/>
+            <a:ext cx="2834640" cy="658368"/>
+          </a:xfrm>
+          <a:prstGeom prst="rect">
+            <a:avLst/>
+          </a:prstGeom>
+          <a:noFill/>
+        </p:spPr>
+        <p:txBody>
+          <a:bodyPr wrap="none" lIns="25400" rIns="25400" tIns="12700" bIns="12700" anchor="t">
+            <a:spAutoFit/>
+          </a:bodyPr>
+          <a:lstStyle/>
+          <a:p>
+            <a:pPr algn="l"/>
+            <a:r>
+              <a:rPr sz="1200" b="0">
+                <a:solidFill>
+                  <a:srgbClr val="252D36"/>
+                </a:solidFill>
+                <a:latin typeface="Aptos"/>
+              </a:rPr>
+              <a:t>Splits normal claims from Record Only incidents.</a:t>
+            </a:r>
+          </a:p>
+        </p:txBody>
+      </p:sp>
+      <p:sp>
+        <p:nvSpPr>
+          <p:cNvPr id="14" name="Rounded Rectangle 13"/>
+          <p:cNvSpPr/>
+          <p:nvPr/>
+        </p:nvSpPr>
+        <p:spPr>
+          <a:xfrm>
+            <a:off x="658368" y="3264408"/>
+            <a:ext cx="475488" cy="475488"/>
+          </a:xfrm>
+          <a:prstGeom prst="roundRect">
+            <a:avLst/>
+          </a:prstGeom>
+          <a:solidFill>
+            <a:srgbClr val="FF4B0A"/>
+          </a:solidFill>
+          <a:ln w="15240">
+            <a:solidFill>
+              <a:srgbClr val="FF4B0A"/>
+            </a:solidFill>
+          </a:ln>
+        </p:spPr>
+        <p:style>
+          <a:lnRef idx="1">
+            <a:schemeClr val="accent1"/>
+          </a:lnRef>
+          <a:fillRef idx="3">
+            <a:schemeClr val="accent1"/>
+          </a:fillRef>
+          <a:effectRef idx="2">
+            <a:schemeClr val="accent1"/>
+          </a:effectRef>
+          <a:fontRef idx="minor">
+            <a:schemeClr val="lt1"/>
+          </a:fontRef>
+        </p:style>
+        <p:txBody>
+          <a:bodyPr rtlCol="0" anchor="ctr" lIns="109728" rIns="109728"/>
+          <a:lstStyle/>
+          <a:p>
+            <a:pPr algn="ctr"/>
+            <a:r>
+              <a:rPr sz="1500" b="1">
+                <a:solidFill>
+                  <a:srgbClr val="FFFFFF"/>
+                </a:solidFill>
+                <a:latin typeface="Aptos"/>
+              </a:rPr>
+              <a:t>4</a:t>
+            </a:r>
+          </a:p>
+        </p:txBody>
+      </p:sp>
+      <p:sp>
+        <p:nvSpPr>
+          <p:cNvPr id="15" name="TextBox 14"/>
+          <p:cNvSpPr txBox="1"/>
+          <p:nvPr/>
+        </p:nvSpPr>
+        <p:spPr>
+          <a:xfrm>
+            <a:off x="1298448" y="3255264"/>
+            <a:ext cx="2788920" cy="274320"/>
+          </a:xfrm>
+          <a:prstGeom prst="rect">
+            <a:avLst/>
+          </a:prstGeom>
+          <a:noFill/>
+        </p:spPr>
+        <p:txBody>
+          <a:bodyPr wrap="none" lIns="25400" rIns="25400" tIns="12700" bIns="12700" anchor="t">
+            <a:spAutoFit/>
+          </a:bodyPr>
+          <a:lstStyle/>
+          <a:p>
+            <a:pPr algn="l"/>
+            <a:r>
+              <a:rPr sz="1600" b="1">
+                <a:solidFill>
+                  <a:srgbClr val="2F2F2F"/>
+                </a:solidFill>
+                <a:latin typeface="Aptos"/>
+              </a:rPr>
+              <a:t>Template population</a:t>
+            </a:r>
+          </a:p>
+        </p:txBody>
+      </p:sp>
+      <p:sp>
+        <p:nvSpPr>
+          <p:cNvPr id="16" name="TextBox 15"/>
+          <p:cNvSpPr txBox="1"/>
+          <p:nvPr/>
+        </p:nvSpPr>
+        <p:spPr>
+          <a:xfrm>
+            <a:off x="1298448" y="3657600"/>
+            <a:ext cx="2834640" cy="658368"/>
+          </a:xfrm>
+          <a:prstGeom prst="rect">
+            <a:avLst/>
+          </a:prstGeom>
+          <a:noFill/>
+        </p:spPr>
+        <p:txBody>
+          <a:bodyPr wrap="none" lIns="25400" rIns="25400" tIns="12700" bIns="12700" anchor="t">
+            <a:spAutoFit/>
+          </a:bodyPr>
+          <a:lstStyle/>
+          <a:p>
+            <a:pPr algn="l"/>
+            <a:r>
+              <a:rPr sz="1200" b="0">
+                <a:solidFill>
+                  <a:srgbClr val="252D36"/>
+                </a:solidFill>
+                <a:latin typeface="Aptos"/>
+              </a:rPr>
+              <a:t>Writes data into Claims Data and Record Only tables.</a:t>
+            </a:r>
+          </a:p>
+        </p:txBody>
+      </p:sp>
+      <p:sp>
+        <p:nvSpPr>
+          <p:cNvPr id="17" name="Rounded Rectangle 16"/>
+          <p:cNvSpPr/>
+          <p:nvPr/>
+        </p:nvSpPr>
+        <p:spPr>
+          <a:xfrm>
+            <a:off x="4498848" y="3264408"/>
+            <a:ext cx="475488" cy="475488"/>
+          </a:xfrm>
+          <a:prstGeom prst="roundRect">
+            <a:avLst/>
+          </a:prstGeom>
+          <a:solidFill>
+            <a:srgbClr val="FF4B0A"/>
+          </a:solidFill>
+          <a:ln w="15240">
+            <a:solidFill>
+              <a:srgbClr val="FF4B0A"/>
+            </a:solidFill>
+          </a:ln>
+        </p:spPr>
+        <p:style>
+          <a:lnRef idx="1">
+            <a:schemeClr val="accent1"/>
+          </a:lnRef>
+          <a:fillRef idx="3">
+            <a:schemeClr val="accent1"/>
+          </a:fillRef>
+          <a:effectRef idx="2">
+            <a:schemeClr val="accent1"/>
+          </a:effectRef>
+          <a:fontRef idx="minor">
+            <a:schemeClr val="lt1"/>
+          </a:fontRef>
+        </p:style>
+        <p:txBody>
+          <a:bodyPr rtlCol="0" anchor="ctr" lIns="109728" rIns="109728"/>
+          <a:lstStyle/>
+          <a:p>
+            <a:pPr algn="ctr"/>
+            <a:r>
+              <a:rPr sz="1500" b="1">
+                <a:solidFill>
+                  <a:srgbClr val="FFFFFF"/>
+                </a:solidFill>
+                <a:latin typeface="Aptos"/>
+              </a:rPr>
+              <a:t>5</a:t>
+            </a:r>
+          </a:p>
+        </p:txBody>
+      </p:sp>
+      <p:sp>
+        <p:nvSpPr>
+          <p:cNvPr id="18" name="TextBox 17"/>
+          <p:cNvSpPr txBox="1"/>
+          <p:nvPr/>
+        </p:nvSpPr>
+        <p:spPr>
+          <a:xfrm>
+            <a:off x="5138928" y="3255264"/>
+            <a:ext cx="2788920" cy="274320"/>
+          </a:xfrm>
+          <a:prstGeom prst="rect">
+            <a:avLst/>
+          </a:prstGeom>
+          <a:noFill/>
+        </p:spPr>
+        <p:txBody>
+          <a:bodyPr wrap="none" lIns="25400" rIns="25400" tIns="12700" bIns="12700" anchor="t">
+            <a:spAutoFit/>
+          </a:bodyPr>
+          <a:lstStyle/>
+          <a:p>
+            <a:pPr algn="l"/>
+            <a:r>
+              <a:rPr sz="1600" b="1">
+                <a:solidFill>
+                  <a:srgbClr val="2F2F2F"/>
+                </a:solidFill>
+                <a:latin typeface="Aptos"/>
+              </a:rPr>
+              <a:t>Workbook updates</a:t>
+            </a:r>
+          </a:p>
+        </p:txBody>
+      </p:sp>
+      <p:sp>
+        <p:nvSpPr>
+          <p:cNvPr id="19" name="TextBox 18"/>
+          <p:cNvSpPr txBox="1"/>
+          <p:nvPr/>
+        </p:nvSpPr>
+        <p:spPr>
+          <a:xfrm>
+            <a:off x="5138928" y="3657600"/>
+            <a:ext cx="2834640" cy="658368"/>
+          </a:xfrm>
+          <a:prstGeom prst="rect">
+            <a:avLst/>
+          </a:prstGeom>
+          <a:noFill/>
+        </p:spPr>
+        <p:txBody>
+          <a:bodyPr wrap="none" lIns="25400" rIns="25400" tIns="12700" bIns="12700" anchor="t">
+            <a:spAutoFit/>
+          </a:bodyPr>
+          <a:lstStyle/>
+          <a:p>
+            <a:pPr algn="l"/>
+            <a:r>
+              <a:rPr sz="1200" b="0">
+                <a:solidFill>
+                  <a:srgbClr val="252D36"/>
+                </a:solidFill>
+                <a:latin typeface="Aptos"/>
+              </a:rPr>
+              <a:t>Adds cover details and sets pivots to refresh on open.</a:t>
+            </a:r>
+          </a:p>
+        </p:txBody>
+      </p:sp>
+      <p:sp>
+        <p:nvSpPr>
+          <p:cNvPr id="20" name="Rounded Rectangle 19"/>
+          <p:cNvSpPr/>
+          <p:nvPr/>
+        </p:nvSpPr>
+        <p:spPr>
+          <a:xfrm>
+            <a:off x="8339328" y="3264408"/>
+            <a:ext cx="475488" cy="475488"/>
+          </a:xfrm>
+          <a:prstGeom prst="roundRect">
+            <a:avLst/>
+          </a:prstGeom>
+          <a:solidFill>
+            <a:srgbClr val="FF4B0A"/>
+          </a:solidFill>
+          <a:ln w="15240">
+            <a:solidFill>
+              <a:srgbClr val="FF4B0A"/>
+            </a:solidFill>
+          </a:ln>
+        </p:spPr>
+        <p:style>
+          <a:lnRef idx="1">
+            <a:schemeClr val="accent1"/>
+          </a:lnRef>
+          <a:fillRef idx="3">
+            <a:schemeClr val="accent1"/>
+          </a:fillRef>
+          <a:effectRef idx="2">
+            <a:schemeClr val="accent1"/>
+          </a:effectRef>
+          <a:fontRef idx="minor">
+            <a:schemeClr val="lt1"/>
+          </a:fontRef>
+        </p:style>
+        <p:txBody>
+          <a:bodyPr rtlCol="0" anchor="ctr" lIns="109728" rIns="109728"/>
+          <a:lstStyle/>
+          <a:p>
+            <a:pPr algn="ctr"/>
+            <a:r>
+              <a:rPr sz="1500" b="1">
+                <a:solidFill>
+                  <a:srgbClr val="FFFFFF"/>
+                </a:solidFill>
+                <a:latin typeface="Aptos"/>
+              </a:rPr>
+              <a:t>6</a:t>
+            </a:r>
+          </a:p>
+        </p:txBody>
+      </p:sp>
+      <p:sp>
+        <p:nvSpPr>
+          <p:cNvPr id="21" name="TextBox 20"/>
+          <p:cNvSpPr txBox="1"/>
+          <p:nvPr/>
+        </p:nvSpPr>
+        <p:spPr>
+          <a:xfrm>
+            <a:off x="8979408" y="3255264"/>
+            <a:ext cx="2788920" cy="274320"/>
+          </a:xfrm>
+          <a:prstGeom prst="rect">
+            <a:avLst/>
+          </a:prstGeom>
+          <a:noFill/>
+        </p:spPr>
+        <p:txBody>
+          <a:bodyPr wrap="none" lIns="25400" rIns="25400" tIns="12700" bIns="12700" anchor="t">
+            <a:spAutoFit/>
+          </a:bodyPr>
+          <a:lstStyle/>
+          <a:p>
+            <a:pPr algn="l"/>
+            <a:r>
+              <a:rPr sz="1600" b="1">
+                <a:solidFill>
+                  <a:srgbClr val="2F2F2F"/>
+                </a:solidFill>
+                <a:latin typeface="Aptos"/>
+              </a:rPr>
+              <a:t>File creation</a:t>
+            </a:r>
+          </a:p>
+        </p:txBody>
+      </p:sp>
+      <p:sp>
+        <p:nvSpPr>
+          <p:cNvPr id="22" name="TextBox 21"/>
+          <p:cNvSpPr txBox="1"/>
+          <p:nvPr/>
+        </p:nvSpPr>
+        <p:spPr>
+          <a:xfrm>
+            <a:off x="8979408" y="3657600"/>
+            <a:ext cx="2834640" cy="658368"/>
+          </a:xfrm>
+          <a:prstGeom prst="rect">
+            <a:avLst/>
+          </a:prstGeom>
+          <a:noFill/>
+        </p:spPr>
+        <p:txBody>
+          <a:bodyPr wrap="none" lIns="25400" rIns="25400" tIns="12700" bIns="12700" anchor="t">
+            <a:spAutoFit/>
+          </a:bodyPr>
+          <a:lstStyle/>
+          <a:p>
+            <a:pPr algn="l"/>
+            <a:r>
+              <a:rPr sz="1200" b="0">
+                <a:solidFill>
+                  <a:srgbClr val="252D36"/>
+                </a:solidFill>
+                <a:latin typeface="Aptos"/>
+              </a:rPr>
+              <a:t>Saves one dated .xlsx workbook for the customer.</a:t>
+            </a:r>
+          </a:p>
+        </p:txBody>
+      </p:sp>
+      <p:sp>
+        <p:nvSpPr>
+          <p:cNvPr id="23" name="Rounded Rectangle 22"/>
+          <p:cNvSpPr/>
+          <p:nvPr/>
+        </p:nvSpPr>
+        <p:spPr>
+          <a:xfrm>
+            <a:off x="685800" y="5257800"/>
+            <a:ext cx="960120" cy="384048"/>
+          </a:xfrm>
+          <a:prstGeom prst="roundRect">
+            <a:avLst/>
+          </a:prstGeom>
+          <a:solidFill>
+            <a:srgbClr val="2F2F2F"/>
+          </a:solidFill>
+          <a:ln w="15240">
+            <a:solidFill>
+              <a:srgbClr val="2F2F2F"/>
+            </a:solidFill>
+          </a:ln>
+        </p:spPr>
+        <p:style>
+          <a:lnRef idx="1">
+            <a:schemeClr val="accent1"/>
+          </a:lnRef>
+          <a:fillRef idx="3">
+            <a:schemeClr val="accent1"/>
+          </a:fillRef>
+          <a:effectRef idx="2">
+            <a:schemeClr val="accent1"/>
+          </a:effectRef>
+          <a:fontRef idx="minor">
+            <a:schemeClr val="lt1"/>
+          </a:fontRef>
+        </p:style>
+        <p:txBody>
+          <a:bodyPr rtlCol="0" anchor="ctr" lIns="109728" rIns="109728"/>
+          <a:lstStyle/>
+          <a:p>
+            <a:pPr algn="ctr"/>
+            <a:r>
+              <a:rPr sz="1100" b="1">
+                <a:solidFill>
+                  <a:srgbClr val="FFFFFF"/>
+                </a:solidFill>
+                <a:latin typeface="Aptos"/>
+              </a:rPr>
+              <a:t>OUTPUT</a:t>
+            </a:r>
+          </a:p>
+        </p:txBody>
+      </p:sp>
+      <p:sp>
+        <p:nvSpPr>
+          <p:cNvPr id="24" name="TextBox 23"/>
+          <p:cNvSpPr txBox="1"/>
+          <p:nvPr/>
+        </p:nvSpPr>
+        <p:spPr>
+          <a:xfrm>
+            <a:off x="1847088" y="5239512"/>
+            <a:ext cx="4160520" cy="320040"/>
+          </a:xfrm>
+          <a:prstGeom prst="rect">
+            <a:avLst/>
+          </a:prstGeom>
+          <a:noFill/>
+        </p:spPr>
+        <p:txBody>
+          <a:bodyPr wrap="none" lIns="25400" rIns="25400" tIns="12700" bIns="12700" anchor="t">
+            <a:spAutoFit/>
+          </a:bodyPr>
+          <a:lstStyle/>
+          <a:p>
+            <a:pPr algn="l"/>
+            <a:r>
+              <a:rPr sz="1500" b="1">
+                <a:solidFill>
+                  <a:srgbClr val="2F2F2F"/>
+                </a:solidFill>
+                <a:latin typeface="Aptos"/>
+              </a:rPr>
+              <a:t>One Microsoft Excel workbook per qualifying customer</a:t>
+            </a:r>
+          </a:p>
+        </p:txBody>
+      </p:sp>
+      <p:sp>
+        <p:nvSpPr>
+          <p:cNvPr id="25" name="TextBox 24"/>
+          <p:cNvSpPr txBox="1"/>
+          <p:nvPr/>
+        </p:nvSpPr>
+        <p:spPr>
+          <a:xfrm>
+            <a:off x="5989320" y="5239512"/>
+            <a:ext cx="5394960" cy="420624"/>
+          </a:xfrm>
+          <a:prstGeom prst="rect">
+            <a:avLst/>
+          </a:prstGeom>
+          <a:noFill/>
+        </p:spPr>
+        <p:txBody>
+          <a:bodyPr wrap="none" lIns="25400" rIns="25400" tIns="12700" bIns="12700" anchor="t">
+            <a:spAutoFit/>
+          </a:bodyPr>
+          <a:lstStyle/>
+          <a:p>
+            <a:pPr algn="l"/>
+            <a:r>
               <a:rPr sz="1300" b="0">
                 <a:solidFill>
+                  <a:srgbClr val="252D36"/>
+                </a:solidFill>
+                <a:latin typeface="Aptos"/>
+              </a:rPr>
+              <a:t>Cover Page • Claims Data • Record Only • Summary by Policy Year • Chart</a:t>
+            </a:r>
+          </a:p>
+        </p:txBody>
+      </p:sp>
+      <p:sp>
+        <p:nvSpPr>
+          <p:cNvPr id="26" name="TextBox 25"/>
+          <p:cNvSpPr txBox="1"/>
+          <p:nvPr/>
+        </p:nvSpPr>
+        <p:spPr>
+          <a:xfrm>
+            <a:off x="1847088" y="5806440"/>
+            <a:ext cx="5760720" cy="256032"/>
+          </a:xfrm>
+          <a:prstGeom prst="rect">
+            <a:avLst/>
+          </a:prstGeom>
+          <a:noFill/>
+        </p:spPr>
+        <p:txBody>
+          <a:bodyPr wrap="none" lIns="25400" rIns="25400" tIns="12700" bIns="12700" anchor="t">
+            <a:spAutoFit/>
+          </a:bodyPr>
+          <a:lstStyle/>
+          <a:p>
+            <a:pPr algn="l"/>
+            <a:r>
+              <a:rPr sz="1100" b="0">
+                <a:solidFill>
                   <a:srgbClr val="6F7A86"/>
                 </a:solidFill>
                 <a:latin typeface="Aptos"/>
               </a:rPr>
-              <a:t>Current filename pattern: &lt;Customer Name&gt;_&lt;YYYY_MM_DD&gt;.xlsx</a:t>
+              <a:t>Filename: &lt;Customer Name&gt;_&lt;YYYY_MM_DD&gt;.xlsx</a:t>
             </a:r>
           </a:p>
         </p:txBody>
@@ -9587,7 +9396,7 @@
                 </a:solidFill>
                 <a:latin typeface="Aptos"/>
               </a:rPr>
-              <a:t>Potential future flow within the existing application</a:t>
+              <a:t>How this could work within the existing application</a:t>
             </a:r>
           </a:p>
         </p:txBody>
@@ -9643,8 +9452,62 @@
         </p:nvSpPr>
         <p:spPr>
           <a:xfrm>
-            <a:off x="475488" y="1874519"/>
-            <a:ext cx="1572768" cy="658368"/>
+            <a:off x="1161288" y="1353312"/>
+            <a:ext cx="438912" cy="438912"/>
+          </a:xfrm>
+          <a:prstGeom prst="roundRect">
+            <a:avLst/>
+          </a:prstGeom>
+          <a:solidFill>
+            <a:srgbClr val="FF4B0A"/>
+          </a:solidFill>
+          <a:ln w="15240">
+            <a:solidFill>
+              <a:srgbClr val="FF4B0A"/>
+            </a:solidFill>
+          </a:ln>
+        </p:spPr>
+        <p:style>
+          <a:lnRef idx="1">
+            <a:schemeClr val="accent1"/>
+          </a:lnRef>
+          <a:fillRef idx="3">
+            <a:schemeClr val="accent1"/>
+          </a:fillRef>
+          <a:effectRef idx="2">
+            <a:schemeClr val="accent1"/>
+          </a:effectRef>
+          <a:fontRef idx="minor">
+            <a:schemeClr val="lt1"/>
+          </a:fontRef>
+        </p:style>
+        <p:txBody>
+          <a:bodyPr rtlCol="0" anchor="ctr" lIns="109728" rIns="109728"/>
+          <a:lstStyle/>
+          <a:p>
+            <a:pPr algn="ctr"/>
+            <a:r>
+              <a:rPr sz="1400" b="1">
+                <a:solidFill>
+                  <a:srgbClr val="FFFFFF"/>
+                </a:solidFill>
+                <a:latin typeface="Aptos"/>
+              </a:rPr>
+              <a:t>1</a:t>
+            </a:r>
+          </a:p>
+        </p:txBody>
+      </p:sp>
+      <p:sp>
+        <p:nvSpPr>
+          <p:cNvPr id="6" name="Rounded Rectangle 5"/>
+          <p:cNvSpPr/>
+          <p:nvPr/>
+        </p:nvSpPr>
+        <p:spPr>
+          <a:xfrm>
+            <a:off x="502920" y="1901952"/>
+            <a:ext cx="1874519" cy="603504"/>
           </a:xfrm>
           <a:prstGeom prst="roundRect">
             <a:avLst/>
@@ -9678,27 +9541,27 @@
           <a:p>
             <a:pPr algn="ctr"/>
             <a:r>
-              <a:rPr sz="1500" b="1">
+              <a:rPr sz="1400" b="1">
                 <a:solidFill>
                   <a:srgbClr val="FFFFFF"/>
                 </a:solidFill>
                 <a:latin typeface="Aptos"/>
               </a:rPr>
-              <a:t>User</a:t>
-            </a:r>
-          </a:p>
-        </p:txBody>
-      </p:sp>
-      <p:sp>
-        <p:nvSpPr>
-          <p:cNvPr id="6" name="TextBox 5"/>
+              <a:t>User request</a:t>
+            </a:r>
+          </a:p>
+        </p:txBody>
+      </p:sp>
+      <p:sp>
+        <p:nvSpPr>
+          <p:cNvPr id="7" name="TextBox 6"/>
           <p:cNvSpPr txBox="1"/>
           <p:nvPr/>
         </p:nvSpPr>
         <p:spPr>
           <a:xfrm>
-            <a:off x="475488" y="2670048"/>
-            <a:ext cx="1572768" cy="548640"/>
+            <a:off x="502920" y="2688336"/>
+            <a:ext cx="1874519" cy="822960"/>
           </a:xfrm>
           <a:prstGeom prst="rect">
             <a:avLst/>
@@ -9719,21 +9582,21 @@
                 </a:solidFill>
                 <a:latin typeface="Aptos"/>
               </a:rPr>
-              <a:t>Selects a customer</a:t>
-            </a:r>
-          </a:p>
-        </p:txBody>
-      </p:sp>
-      <p:sp>
-        <p:nvSpPr>
-          <p:cNvPr id="7" name="Right Arrow 6"/>
+              <a:t>User selects a customer and clicks Generate Loss Run.</a:t>
+            </a:r>
+          </a:p>
+        </p:txBody>
+      </p:sp>
+      <p:sp>
+        <p:nvSpPr>
+          <p:cNvPr id="8" name="Right Arrow 7"/>
           <p:cNvSpPr/>
           <p:nvPr/>
         </p:nvSpPr>
         <p:spPr>
           <a:xfrm>
-            <a:off x="2103120" y="2084831"/>
-            <a:ext cx="265176" cy="228600"/>
+            <a:off x="2441448" y="2093976"/>
+            <a:ext cx="320040" cy="228600"/>
           </a:xfrm>
           <a:prstGeom prst="rightArrow">
             <a:avLst/>
@@ -9769,14 +9632,14 @@
       </p:sp>
       <p:sp>
         <p:nvSpPr>
-          <p:cNvPr id="8" name="Rounded Rectangle 7"/>
+          <p:cNvPr id="9" name="Rounded Rectangle 8"/>
           <p:cNvSpPr/>
           <p:nvPr/>
         </p:nvSpPr>
         <p:spPr>
           <a:xfrm>
-            <a:off x="2414016" y="1874519"/>
-            <a:ext cx="1572768" cy="658368"/>
+            <a:off x="3493007" y="1353312"/>
+            <a:ext cx="438912" cy="438912"/>
           </a:xfrm>
           <a:prstGeom prst="roundRect">
             <a:avLst/>
@@ -9810,27 +9673,81 @@
           <a:p>
             <a:pPr algn="ctr"/>
             <a:r>
-              <a:rPr sz="1500" b="1">
+              <a:rPr sz="1400" b="1">
                 <a:solidFill>
                   <a:srgbClr val="FFFFFF"/>
                 </a:solidFill>
                 <a:latin typeface="Aptos"/>
               </a:rPr>
-              <a:t>Application UI</a:t>
-            </a:r>
-          </a:p>
-        </p:txBody>
-      </p:sp>
-      <p:sp>
-        <p:nvSpPr>
-          <p:cNvPr id="9" name="TextBox 8"/>
+              <a:t>2</a:t>
+            </a:r>
+          </a:p>
+        </p:txBody>
+      </p:sp>
+      <p:sp>
+        <p:nvSpPr>
+          <p:cNvPr id="10" name="Rounded Rectangle 9"/>
+          <p:cNvSpPr/>
+          <p:nvPr/>
+        </p:nvSpPr>
+        <p:spPr>
+          <a:xfrm>
+            <a:off x="2834639" y="1901952"/>
+            <a:ext cx="1874519" cy="603504"/>
+          </a:xfrm>
+          <a:prstGeom prst="roundRect">
+            <a:avLst/>
+          </a:prstGeom>
+          <a:solidFill>
+            <a:srgbClr val="FF4B0A"/>
+          </a:solidFill>
+          <a:ln w="15240">
+            <a:solidFill>
+              <a:srgbClr val="FF4B0A"/>
+            </a:solidFill>
+          </a:ln>
+        </p:spPr>
+        <p:style>
+          <a:lnRef idx="1">
+            <a:schemeClr val="accent1"/>
+          </a:lnRef>
+          <a:fillRef idx="3">
+            <a:schemeClr val="accent1"/>
+          </a:fillRef>
+          <a:effectRef idx="2">
+            <a:schemeClr val="accent1"/>
+          </a:effectRef>
+          <a:fontRef idx="minor">
+            <a:schemeClr val="lt1"/>
+          </a:fontRef>
+        </p:style>
+        <p:txBody>
+          <a:bodyPr rtlCol="0" anchor="ctr" lIns="109728" rIns="109728"/>
+          <a:lstStyle/>
+          <a:p>
+            <a:pPr algn="ctr"/>
+            <a:r>
+              <a:rPr sz="1400" b="1">
+                <a:solidFill>
+                  <a:srgbClr val="FFFFFF"/>
+                </a:solidFill>
+                <a:latin typeface="Aptos"/>
+              </a:rPr>
+              <a:t>API validation</a:t>
+            </a:r>
+          </a:p>
+        </p:txBody>
+      </p:sp>
+      <p:sp>
+        <p:nvSpPr>
+          <p:cNvPr id="11" name="TextBox 10"/>
           <p:cNvSpPr txBox="1"/>
           <p:nvPr/>
         </p:nvSpPr>
         <p:spPr>
           <a:xfrm>
-            <a:off x="2414016" y="2670048"/>
-            <a:ext cx="1572768" cy="548640"/>
+            <a:off x="2834639" y="2688336"/>
+            <a:ext cx="1874519" cy="822960"/>
           </a:xfrm>
           <a:prstGeom prst="rect">
             <a:avLst/>
@@ -9851,21 +9768,21 @@
                 </a:solidFill>
                 <a:latin typeface="Aptos"/>
               </a:rPr>
-              <a:t>Requests a loss run</a:t>
-            </a:r>
-          </a:p>
-        </p:txBody>
-      </p:sp>
-      <p:sp>
-        <p:nvSpPr>
-          <p:cNvPr id="10" name="Right Arrow 9"/>
+              <a:t>FastAPI confirms authentication and the customer request.</a:t>
+            </a:r>
+          </a:p>
+        </p:txBody>
+      </p:sp>
+      <p:sp>
+        <p:nvSpPr>
+          <p:cNvPr id="12" name="Right Arrow 11"/>
           <p:cNvSpPr/>
           <p:nvPr/>
         </p:nvSpPr>
         <p:spPr>
           <a:xfrm>
-            <a:off x="4041648" y="2084831"/>
-            <a:ext cx="265176" cy="228600"/>
+            <a:off x="4773168" y="2093976"/>
+            <a:ext cx="320040" cy="228600"/>
           </a:xfrm>
           <a:prstGeom prst="rightArrow">
             <a:avLst/>
@@ -9901,14 +9818,529 @@
       </p:sp>
       <p:sp>
         <p:nvSpPr>
-          <p:cNvPr id="11" name="Rounded Rectangle 10"/>
+          <p:cNvPr id="13" name="Rounded Rectangle 12"/>
           <p:cNvSpPr/>
           <p:nvPr/>
         </p:nvSpPr>
         <p:spPr>
           <a:xfrm>
-            <a:off x="4352544" y="1874519"/>
-            <a:ext cx="1572768" cy="658368"/>
+            <a:off x="5824727" y="1353312"/>
+            <a:ext cx="438912" cy="438912"/>
+          </a:xfrm>
+          <a:prstGeom prst="roundRect">
+            <a:avLst/>
+          </a:prstGeom>
+          <a:solidFill>
+            <a:srgbClr val="FF4B0A"/>
+          </a:solidFill>
+          <a:ln w="15240">
+            <a:solidFill>
+              <a:srgbClr val="FF4B0A"/>
+            </a:solidFill>
+          </a:ln>
+        </p:spPr>
+        <p:style>
+          <a:lnRef idx="1">
+            <a:schemeClr val="accent1"/>
+          </a:lnRef>
+          <a:fillRef idx="3">
+            <a:schemeClr val="accent1"/>
+          </a:fillRef>
+          <a:effectRef idx="2">
+            <a:schemeClr val="accent1"/>
+          </a:effectRef>
+          <a:fontRef idx="minor">
+            <a:schemeClr val="lt1"/>
+          </a:fontRef>
+        </p:style>
+        <p:txBody>
+          <a:bodyPr rtlCol="0" anchor="ctr" lIns="109728" rIns="109728"/>
+          <a:lstStyle/>
+          <a:p>
+            <a:pPr algn="ctr"/>
+            <a:r>
+              <a:rPr sz="1400" b="1">
+                <a:solidFill>
+                  <a:srgbClr val="FFFFFF"/>
+                </a:solidFill>
+                <a:latin typeface="Aptos"/>
+              </a:rPr>
+              <a:t>3</a:t>
+            </a:r>
+          </a:p>
+        </p:txBody>
+      </p:sp>
+      <p:sp>
+        <p:nvSpPr>
+          <p:cNvPr id="14" name="Rounded Rectangle 13"/>
+          <p:cNvSpPr/>
+          <p:nvPr/>
+        </p:nvSpPr>
+        <p:spPr>
+          <a:xfrm>
+            <a:off x="5166359" y="1901952"/>
+            <a:ext cx="1874519" cy="603504"/>
+          </a:xfrm>
+          <a:prstGeom prst="roundRect">
+            <a:avLst/>
+          </a:prstGeom>
+          <a:solidFill>
+            <a:srgbClr val="FF4B0A"/>
+          </a:solidFill>
+          <a:ln w="15240">
+            <a:solidFill>
+              <a:srgbClr val="FF4B0A"/>
+            </a:solidFill>
+          </a:ln>
+        </p:spPr>
+        <p:style>
+          <a:lnRef idx="1">
+            <a:schemeClr val="accent1"/>
+          </a:lnRef>
+          <a:fillRef idx="3">
+            <a:schemeClr val="accent1"/>
+          </a:fillRef>
+          <a:effectRef idx="2">
+            <a:schemeClr val="accent1"/>
+          </a:effectRef>
+          <a:fontRef idx="minor">
+            <a:schemeClr val="lt1"/>
+          </a:fontRef>
+        </p:style>
+        <p:txBody>
+          <a:bodyPr rtlCol="0" anchor="ctr" lIns="109728" rIns="109728"/>
+          <a:lstStyle/>
+          <a:p>
+            <a:pPr algn="ctr"/>
+            <a:r>
+              <a:rPr sz="1400" b="1">
+                <a:solidFill>
+                  <a:srgbClr val="FFFFFF"/>
+                </a:solidFill>
+                <a:latin typeface="Aptos"/>
+              </a:rPr>
+              <a:t>View query</a:t>
+            </a:r>
+          </a:p>
+        </p:txBody>
+      </p:sp>
+      <p:sp>
+        <p:nvSpPr>
+          <p:cNvPr id="15" name="TextBox 14"/>
+          <p:cNvSpPr txBox="1"/>
+          <p:nvPr/>
+        </p:nvSpPr>
+        <p:spPr>
+          <a:xfrm>
+            <a:off x="5166359" y="2688336"/>
+            <a:ext cx="1874519" cy="822960"/>
+          </a:xfrm>
+          <a:prstGeom prst="rect">
+            <a:avLst/>
+          </a:prstGeom>
+          <a:noFill/>
+        </p:spPr>
+        <p:txBody>
+          <a:bodyPr wrap="none" lIns="25400" rIns="25400" tIns="12700" bIns="12700" anchor="t">
+            <a:spAutoFit/>
+          </a:bodyPr>
+          <a:lstStyle/>
+          <a:p>
+            <a:pPr algn="ctr"/>
+            <a:r>
+              <a:rPr sz="1100" b="0">
+                <a:solidFill>
+                  <a:srgbClr val="252D36"/>
+                </a:solidFill>
+                <a:latin typeface="Aptos"/>
+              </a:rPr>
+              <a:t>Application requests only that customer's loss-run rows.</a:t>
+            </a:r>
+          </a:p>
+        </p:txBody>
+      </p:sp>
+      <p:sp>
+        <p:nvSpPr>
+          <p:cNvPr id="16" name="Right Arrow 15"/>
+          <p:cNvSpPr/>
+          <p:nvPr/>
+        </p:nvSpPr>
+        <p:spPr>
+          <a:xfrm>
+            <a:off x="7104888" y="2093976"/>
+            <a:ext cx="320040" cy="228600"/>
+          </a:xfrm>
+          <a:prstGeom prst="rightArrow">
+            <a:avLst/>
+          </a:prstGeom>
+          <a:solidFill>
+            <a:srgbClr val="FF8936"/>
+          </a:solidFill>
+          <a:ln>
+            <a:noFill/>
+          </a:ln>
+        </p:spPr>
+        <p:style>
+          <a:lnRef idx="1">
+            <a:schemeClr val="accent1"/>
+          </a:lnRef>
+          <a:fillRef idx="3">
+            <a:schemeClr val="accent1"/>
+          </a:fillRef>
+          <a:effectRef idx="2">
+            <a:schemeClr val="accent1"/>
+          </a:effectRef>
+          <a:fontRef idx="minor">
+            <a:schemeClr val="lt1"/>
+          </a:fontRef>
+        </p:style>
+        <p:txBody>
+          <a:bodyPr rtlCol="0" anchor="ctr"/>
+          <a:lstStyle/>
+          <a:p>
+            <a:pPr algn="ctr"/>
+          </a:p>
+        </p:txBody>
+      </p:sp>
+      <p:sp>
+        <p:nvSpPr>
+          <p:cNvPr id="17" name="Rounded Rectangle 16"/>
+          <p:cNvSpPr/>
+          <p:nvPr/>
+        </p:nvSpPr>
+        <p:spPr>
+          <a:xfrm>
+            <a:off x="8156448" y="1353312"/>
+            <a:ext cx="438912" cy="438912"/>
+          </a:xfrm>
+          <a:prstGeom prst="roundRect">
+            <a:avLst/>
+          </a:prstGeom>
+          <a:solidFill>
+            <a:srgbClr val="FF4B0A"/>
+          </a:solidFill>
+          <a:ln w="15240">
+            <a:solidFill>
+              <a:srgbClr val="FF4B0A"/>
+            </a:solidFill>
+          </a:ln>
+        </p:spPr>
+        <p:style>
+          <a:lnRef idx="1">
+            <a:schemeClr val="accent1"/>
+          </a:lnRef>
+          <a:fillRef idx="3">
+            <a:schemeClr val="accent1"/>
+          </a:fillRef>
+          <a:effectRef idx="2">
+            <a:schemeClr val="accent1"/>
+          </a:effectRef>
+          <a:fontRef idx="minor">
+            <a:schemeClr val="lt1"/>
+          </a:fontRef>
+        </p:style>
+        <p:txBody>
+          <a:bodyPr rtlCol="0" anchor="ctr" lIns="109728" rIns="109728"/>
+          <a:lstStyle/>
+          <a:p>
+            <a:pPr algn="ctr"/>
+            <a:r>
+              <a:rPr sz="1400" b="1">
+                <a:solidFill>
+                  <a:srgbClr val="FFFFFF"/>
+                </a:solidFill>
+                <a:latin typeface="Aptos"/>
+              </a:rPr>
+              <a:t>4</a:t>
+            </a:r>
+          </a:p>
+        </p:txBody>
+      </p:sp>
+      <p:sp>
+        <p:nvSpPr>
+          <p:cNvPr id="18" name="Rounded Rectangle 17"/>
+          <p:cNvSpPr/>
+          <p:nvPr/>
+        </p:nvSpPr>
+        <p:spPr>
+          <a:xfrm>
+            <a:off x="7498079" y="1901952"/>
+            <a:ext cx="1874519" cy="603504"/>
+          </a:xfrm>
+          <a:prstGeom prst="roundRect">
+            <a:avLst/>
+          </a:prstGeom>
+          <a:solidFill>
+            <a:srgbClr val="FF4B0A"/>
+          </a:solidFill>
+          <a:ln w="15240">
+            <a:solidFill>
+              <a:srgbClr val="FF4B0A"/>
+            </a:solidFill>
+          </a:ln>
+        </p:spPr>
+        <p:style>
+          <a:lnRef idx="1">
+            <a:schemeClr val="accent1"/>
+          </a:lnRef>
+          <a:fillRef idx="3">
+            <a:schemeClr val="accent1"/>
+          </a:fillRef>
+          <a:effectRef idx="2">
+            <a:schemeClr val="accent1"/>
+          </a:effectRef>
+          <a:fontRef idx="minor">
+            <a:schemeClr val="lt1"/>
+          </a:fontRef>
+        </p:style>
+        <p:txBody>
+          <a:bodyPr rtlCol="0" anchor="ctr" lIns="109728" rIns="109728"/>
+          <a:lstStyle/>
+          <a:p>
+            <a:pPr algn="ctr"/>
+            <a:r>
+              <a:rPr sz="1400" b="1">
+                <a:solidFill>
+                  <a:srgbClr val="FFFFFF"/>
+                </a:solidFill>
+                <a:latin typeface="Aptos"/>
+              </a:rPr>
+              <a:t>Excel creation</a:t>
+            </a:r>
+          </a:p>
+        </p:txBody>
+      </p:sp>
+      <p:sp>
+        <p:nvSpPr>
+          <p:cNvPr id="19" name="TextBox 18"/>
+          <p:cNvSpPr txBox="1"/>
+          <p:nvPr/>
+        </p:nvSpPr>
+        <p:spPr>
+          <a:xfrm>
+            <a:off x="7498079" y="2688336"/>
+            <a:ext cx="1874519" cy="822960"/>
+          </a:xfrm>
+          <a:prstGeom prst="rect">
+            <a:avLst/>
+          </a:prstGeom>
+          <a:noFill/>
+        </p:spPr>
+        <p:txBody>
+          <a:bodyPr wrap="none" lIns="25400" rIns="25400" tIns="12700" bIns="12700" anchor="t">
+            <a:spAutoFit/>
+          </a:bodyPr>
+          <a:lstStyle/>
+          <a:p>
+            <a:pPr algn="ctr"/>
+            <a:r>
+              <a:rPr sz="1100" b="0">
+                <a:solidFill>
+                  <a:srgbClr val="252D36"/>
+                </a:solidFill>
+                <a:latin typeface="Aptos"/>
+              </a:rPr>
+              <a:t>Service applies current formatting and fills the template.</a:t>
+            </a:r>
+          </a:p>
+        </p:txBody>
+      </p:sp>
+      <p:sp>
+        <p:nvSpPr>
+          <p:cNvPr id="20" name="Right Arrow 19"/>
+          <p:cNvSpPr/>
+          <p:nvPr/>
+        </p:nvSpPr>
+        <p:spPr>
+          <a:xfrm>
+            <a:off x="9436608" y="2093976"/>
+            <a:ext cx="320040" cy="228600"/>
+          </a:xfrm>
+          <a:prstGeom prst="rightArrow">
+            <a:avLst/>
+          </a:prstGeom>
+          <a:solidFill>
+            <a:srgbClr val="FF8936"/>
+          </a:solidFill>
+          <a:ln>
+            <a:noFill/>
+          </a:ln>
+        </p:spPr>
+        <p:style>
+          <a:lnRef idx="1">
+            <a:schemeClr val="accent1"/>
+          </a:lnRef>
+          <a:fillRef idx="3">
+            <a:schemeClr val="accent1"/>
+          </a:fillRef>
+          <a:effectRef idx="2">
+            <a:schemeClr val="accent1"/>
+          </a:effectRef>
+          <a:fontRef idx="minor">
+            <a:schemeClr val="lt1"/>
+          </a:fontRef>
+        </p:style>
+        <p:txBody>
+          <a:bodyPr rtlCol="0" anchor="ctr"/>
+          <a:lstStyle/>
+          <a:p>
+            <a:pPr algn="ctr"/>
+          </a:p>
+        </p:txBody>
+      </p:sp>
+      <p:sp>
+        <p:nvSpPr>
+          <p:cNvPr id="21" name="Rounded Rectangle 20"/>
+          <p:cNvSpPr/>
+          <p:nvPr/>
+        </p:nvSpPr>
+        <p:spPr>
+          <a:xfrm>
+            <a:off x="10488168" y="1353312"/>
+            <a:ext cx="438912" cy="438912"/>
+          </a:xfrm>
+          <a:prstGeom prst="roundRect">
+            <a:avLst/>
+          </a:prstGeom>
+          <a:solidFill>
+            <a:srgbClr val="FF4B0A"/>
+          </a:solidFill>
+          <a:ln w="15240">
+            <a:solidFill>
+              <a:srgbClr val="FF4B0A"/>
+            </a:solidFill>
+          </a:ln>
+        </p:spPr>
+        <p:style>
+          <a:lnRef idx="1">
+            <a:schemeClr val="accent1"/>
+          </a:lnRef>
+          <a:fillRef idx="3">
+            <a:schemeClr val="accent1"/>
+          </a:fillRef>
+          <a:effectRef idx="2">
+            <a:schemeClr val="accent1"/>
+          </a:effectRef>
+          <a:fontRef idx="minor">
+            <a:schemeClr val="lt1"/>
+          </a:fontRef>
+        </p:style>
+        <p:txBody>
+          <a:bodyPr rtlCol="0" anchor="ctr" lIns="109728" rIns="109728"/>
+          <a:lstStyle/>
+          <a:p>
+            <a:pPr algn="ctr"/>
+            <a:r>
+              <a:rPr sz="1400" b="1">
+                <a:solidFill>
+                  <a:srgbClr val="FFFFFF"/>
+                </a:solidFill>
+                <a:latin typeface="Aptos"/>
+              </a:rPr>
+              <a:t>5</a:t>
+            </a:r>
+          </a:p>
+        </p:txBody>
+      </p:sp>
+      <p:sp>
+        <p:nvSpPr>
+          <p:cNvPr id="22" name="Rounded Rectangle 21"/>
+          <p:cNvSpPr/>
+          <p:nvPr/>
+        </p:nvSpPr>
+        <p:spPr>
+          <a:xfrm>
+            <a:off x="9829800" y="1901952"/>
+            <a:ext cx="1874519" cy="603504"/>
+          </a:xfrm>
+          <a:prstGeom prst="roundRect">
+            <a:avLst/>
+          </a:prstGeom>
+          <a:solidFill>
+            <a:srgbClr val="2F2F2F"/>
+          </a:solidFill>
+          <a:ln w="15240">
+            <a:solidFill>
+              <a:srgbClr val="2F2F2F"/>
+            </a:solidFill>
+          </a:ln>
+        </p:spPr>
+        <p:style>
+          <a:lnRef idx="1">
+            <a:schemeClr val="accent1"/>
+          </a:lnRef>
+          <a:fillRef idx="3">
+            <a:schemeClr val="accent1"/>
+          </a:fillRef>
+          <a:effectRef idx="2">
+            <a:schemeClr val="accent1"/>
+          </a:effectRef>
+          <a:fontRef idx="minor">
+            <a:schemeClr val="lt1"/>
+          </a:fontRef>
+        </p:style>
+        <p:txBody>
+          <a:bodyPr rtlCol="0" anchor="ctr" lIns="109728" rIns="109728"/>
+          <a:lstStyle/>
+          <a:p>
+            <a:pPr algn="ctr"/>
+            <a:r>
+              <a:rPr sz="1400" b="1">
+                <a:solidFill>
+                  <a:srgbClr val="FFFFFF"/>
+                </a:solidFill>
+                <a:latin typeface="Aptos"/>
+              </a:rPr>
+              <a:t>File response</a:t>
+            </a:r>
+          </a:p>
+        </p:txBody>
+      </p:sp>
+      <p:sp>
+        <p:nvSpPr>
+          <p:cNvPr id="23" name="TextBox 22"/>
+          <p:cNvSpPr txBox="1"/>
+          <p:nvPr/>
+        </p:nvSpPr>
+        <p:spPr>
+          <a:xfrm>
+            <a:off x="9829800" y="2688336"/>
+            <a:ext cx="1874519" cy="822960"/>
+          </a:xfrm>
+          <a:prstGeom prst="rect">
+            <a:avLst/>
+          </a:prstGeom>
+          <a:noFill/>
+        </p:spPr>
+        <p:txBody>
+          <a:bodyPr wrap="none" lIns="25400" rIns="25400" tIns="12700" bIns="12700" anchor="t">
+            <a:spAutoFit/>
+          </a:bodyPr>
+          <a:lstStyle/>
+          <a:p>
+            <a:pPr algn="ctr"/>
+            <a:r>
+              <a:rPr sz="1100" b="0">
+                <a:solidFill>
+                  <a:srgbClr val="252D36"/>
+                </a:solidFill>
+                <a:latin typeface="Aptos"/>
+              </a:rPr>
+              <a:t>The completed .xlsx workbook is returned to the user.</a:t>
+            </a:r>
+          </a:p>
+        </p:txBody>
+      </p:sp>
+      <p:sp>
+        <p:nvSpPr>
+          <p:cNvPr id="24" name="Rounded Rectangle 23"/>
+          <p:cNvSpPr/>
+          <p:nvPr/>
+        </p:nvSpPr>
+        <p:spPr>
+          <a:xfrm>
+            <a:off x="713232" y="4087368"/>
+            <a:ext cx="1234440" cy="384048"/>
           </a:xfrm>
           <a:prstGeom prst="roundRect">
             <a:avLst/>
@@ -9942,27 +10374,27 @@
           <a:p>
             <a:pPr algn="ctr"/>
             <a:r>
-              <a:rPr sz="1500" b="1">
+              <a:rPr sz="1100" b="1">
                 <a:solidFill>
                   <a:srgbClr val="FFFFFF"/>
                 </a:solidFill>
                 <a:latin typeface="Aptos"/>
               </a:rPr>
-              <a:t>FastAPI</a:t>
-            </a:r>
-          </a:p>
-        </p:txBody>
-      </p:sp>
-      <p:sp>
-        <p:nvSpPr>
-          <p:cNvPr id="12" name="TextBox 11"/>
+              <a:t>What stays</a:t>
+            </a:r>
+          </a:p>
+        </p:txBody>
+      </p:sp>
+      <p:sp>
+        <p:nvSpPr>
+          <p:cNvPr id="25" name="TextBox 24"/>
           <p:cNvSpPr txBox="1"/>
           <p:nvPr/>
         </p:nvSpPr>
         <p:spPr>
           <a:xfrm>
-            <a:off x="4352544" y="2670048"/>
-            <a:ext cx="1572768" cy="548640"/>
+            <a:off x="2148840" y="4059936"/>
+            <a:ext cx="8869680" cy="384048"/>
           </a:xfrm>
           <a:prstGeom prst="rect">
             <a:avLst/>
@@ -9975,72 +10407,29 @@
           </a:bodyPr>
           <a:lstStyle/>
           <a:p>
-            <a:pPr algn="ctr"/>
-            <a:r>
-              <a:rPr sz="1100" b="0">
+            <a:pPr algn="l"/>
+            <a:r>
+              <a:rPr sz="1400" b="0">
                 <a:solidFill>
                   <a:srgbClr val="252D36"/>
                 </a:solidFill>
                 <a:latin typeface="Aptos"/>
               </a:rPr>
-              <a:t>Validates and coordinates</a:t>
-            </a:r>
-          </a:p>
-        </p:txBody>
-      </p:sp>
-      <p:sp>
-        <p:nvSpPr>
-          <p:cNvPr id="13" name="Right Arrow 12"/>
+              <a:t>SAC_Loss_Run view • business calculations • Excel layout and report rules</a:t>
+            </a:r>
+          </a:p>
+        </p:txBody>
+      </p:sp>
+      <p:sp>
+        <p:nvSpPr>
+          <p:cNvPr id="26" name="Rounded Rectangle 25"/>
           <p:cNvSpPr/>
           <p:nvPr/>
         </p:nvSpPr>
         <p:spPr>
           <a:xfrm>
-            <a:off x="5980176" y="2084831"/>
-            <a:ext cx="265176" cy="228600"/>
-          </a:xfrm>
-          <a:prstGeom prst="rightArrow">
-            <a:avLst/>
-          </a:prstGeom>
-          <a:solidFill>
-            <a:srgbClr val="FF8936"/>
-          </a:solidFill>
-          <a:ln>
-            <a:noFill/>
-          </a:ln>
-        </p:spPr>
-        <p:style>
-          <a:lnRef idx="1">
-            <a:schemeClr val="accent1"/>
-          </a:lnRef>
-          <a:fillRef idx="3">
-            <a:schemeClr val="accent1"/>
-          </a:fillRef>
-          <a:effectRef idx="2">
-            <a:schemeClr val="accent1"/>
-          </a:effectRef>
-          <a:fontRef idx="minor">
-            <a:schemeClr val="lt1"/>
-          </a:fontRef>
-        </p:style>
-        <p:txBody>
-          <a:bodyPr rtlCol="0" anchor="ctr"/>
-          <a:lstStyle/>
-          <a:p>
-            <a:pPr algn="ctr"/>
-          </a:p>
-        </p:txBody>
-      </p:sp>
-      <p:sp>
-        <p:nvSpPr>
-          <p:cNvPr id="14" name="Rounded Rectangle 13"/>
-          <p:cNvSpPr/>
-          <p:nvPr/>
-        </p:nvSpPr>
-        <p:spPr>
-          <a:xfrm>
-            <a:off x="6291072" y="1874519"/>
-            <a:ext cx="1572768" cy="658368"/>
+            <a:off x="713232" y="4782312"/>
+            <a:ext cx="1234440" cy="384048"/>
           </a:xfrm>
           <a:prstGeom prst="roundRect">
             <a:avLst/>
@@ -10074,27 +10463,27 @@
           <a:p>
             <a:pPr algn="ctr"/>
             <a:r>
-              <a:rPr sz="1500" b="1">
+              <a:rPr sz="1100" b="1">
                 <a:solidFill>
                   <a:srgbClr val="FFFFFF"/>
                 </a:solidFill>
                 <a:latin typeface="Aptos"/>
               </a:rPr>
-              <a:t>SAC_Loss_Run</a:t>
-            </a:r>
-          </a:p>
-        </p:txBody>
-      </p:sp>
-      <p:sp>
-        <p:nvSpPr>
-          <p:cNvPr id="15" name="TextBox 14"/>
+              <a:t>What changes</a:t>
+            </a:r>
+          </a:p>
+        </p:txBody>
+      </p:sp>
+      <p:sp>
+        <p:nvSpPr>
+          <p:cNvPr id="27" name="TextBox 26"/>
           <p:cNvSpPr txBox="1"/>
           <p:nvPr/>
         </p:nvSpPr>
         <p:spPr>
           <a:xfrm>
-            <a:off x="6291072" y="2670048"/>
-            <a:ext cx="1572768" cy="548640"/>
+            <a:off x="2148840" y="4754880"/>
+            <a:ext cx="8869680" cy="457200"/>
           </a:xfrm>
           <a:prstGeom prst="rect">
             <a:avLst/>
@@ -10107,464 +10496,22 @@
           </a:bodyPr>
           <a:lstStyle/>
           <a:p>
-            <a:pPr algn="ctr"/>
-            <a:r>
-              <a:rPr sz="1100" b="0">
+            <a:pPr algn="l"/>
+            <a:r>
+              <a:rPr sz="1400" b="0">
                 <a:solidFill>
                   <a:srgbClr val="252D36"/>
                 </a:solidFill>
                 <a:latin typeface="Aptos"/>
               </a:rPr>
-              <a:t>Returns selected customer's data</a:t>
-            </a:r>
-          </a:p>
-        </p:txBody>
-      </p:sp>
-      <p:sp>
-        <p:nvSpPr>
-          <p:cNvPr id="16" name="Right Arrow 15"/>
-          <p:cNvSpPr/>
-          <p:nvPr/>
-        </p:nvSpPr>
-        <p:spPr>
-          <a:xfrm>
-            <a:off x="7918704" y="2084831"/>
-            <a:ext cx="265176" cy="228600"/>
-          </a:xfrm>
-          <a:prstGeom prst="rightArrow">
-            <a:avLst/>
-          </a:prstGeom>
-          <a:solidFill>
-            <a:srgbClr val="FF8936"/>
-          </a:solidFill>
-          <a:ln>
-            <a:noFill/>
-          </a:ln>
-        </p:spPr>
-        <p:style>
-          <a:lnRef idx="1">
-            <a:schemeClr val="accent1"/>
-          </a:lnRef>
-          <a:fillRef idx="3">
-            <a:schemeClr val="accent1"/>
-          </a:fillRef>
-          <a:effectRef idx="2">
-            <a:schemeClr val="accent1"/>
-          </a:effectRef>
-          <a:fontRef idx="minor">
-            <a:schemeClr val="lt1"/>
-          </a:fontRef>
-        </p:style>
-        <p:txBody>
-          <a:bodyPr rtlCol="0" anchor="ctr"/>
-          <a:lstStyle/>
-          <a:p>
-            <a:pPr algn="ctr"/>
-          </a:p>
-        </p:txBody>
-      </p:sp>
-      <p:sp>
-        <p:nvSpPr>
-          <p:cNvPr id="17" name="Rounded Rectangle 16"/>
-          <p:cNvSpPr/>
-          <p:nvPr/>
-        </p:nvSpPr>
-        <p:spPr>
-          <a:xfrm>
-            <a:off x="8229600" y="1874519"/>
-            <a:ext cx="1572768" cy="658368"/>
-          </a:xfrm>
-          <a:prstGeom prst="roundRect">
-            <a:avLst/>
-          </a:prstGeom>
-          <a:solidFill>
-            <a:srgbClr val="368959"/>
-          </a:solidFill>
-          <a:ln w="15240">
-            <a:solidFill>
-              <a:srgbClr val="368959"/>
-            </a:solidFill>
-          </a:ln>
-        </p:spPr>
-        <p:style>
-          <a:lnRef idx="1">
-            <a:schemeClr val="accent1"/>
-          </a:lnRef>
-          <a:fillRef idx="3">
-            <a:schemeClr val="accent1"/>
-          </a:fillRef>
-          <a:effectRef idx="2">
-            <a:schemeClr val="accent1"/>
-          </a:effectRef>
-          <a:fontRef idx="minor">
-            <a:schemeClr val="lt1"/>
-          </a:fontRef>
-        </p:style>
-        <p:txBody>
-          <a:bodyPr rtlCol="0" anchor="ctr" lIns="109728" rIns="109728"/>
-          <a:lstStyle/>
-          <a:p>
-            <a:pPr algn="ctr"/>
-            <a:r>
-              <a:rPr sz="1500" b="1">
-                <a:solidFill>
-                  <a:srgbClr val="FFFFFF"/>
-                </a:solidFill>
-                <a:latin typeface="Aptos"/>
-              </a:rPr>
-              <a:t>Excel service</a:t>
-            </a:r>
-          </a:p>
-        </p:txBody>
-      </p:sp>
-      <p:sp>
-        <p:nvSpPr>
-          <p:cNvPr id="18" name="TextBox 17"/>
-          <p:cNvSpPr txBox="1"/>
-          <p:nvPr/>
-        </p:nvSpPr>
-        <p:spPr>
-          <a:xfrm>
-            <a:off x="8229600" y="2670048"/>
-            <a:ext cx="1572768" cy="548640"/>
-          </a:xfrm>
-          <a:prstGeom prst="rect">
-            <a:avLst/>
-          </a:prstGeom>
-          <a:noFill/>
-        </p:spPr>
-        <p:txBody>
-          <a:bodyPr wrap="none" lIns="25400" rIns="25400" tIns="12700" bIns="12700" anchor="t">
-            <a:spAutoFit/>
-          </a:bodyPr>
-          <a:lstStyle/>
-          <a:p>
-            <a:pPr algn="ctr"/>
-            <a:r>
-              <a:rPr sz="1100" b="0">
-                <a:solidFill>
-                  <a:srgbClr val="252D36"/>
-                </a:solidFill>
-                <a:latin typeface="Aptos"/>
-              </a:rPr>
-              <a:t>Fills existing template</a:t>
-            </a:r>
-          </a:p>
-        </p:txBody>
-      </p:sp>
-      <p:sp>
-        <p:nvSpPr>
-          <p:cNvPr id="19" name="Right Arrow 18"/>
-          <p:cNvSpPr/>
-          <p:nvPr/>
-        </p:nvSpPr>
-        <p:spPr>
-          <a:xfrm>
-            <a:off x="9857232" y="2084831"/>
-            <a:ext cx="265176" cy="228600"/>
-          </a:xfrm>
-          <a:prstGeom prst="rightArrow">
-            <a:avLst/>
-          </a:prstGeom>
-          <a:solidFill>
-            <a:srgbClr val="FF8936"/>
-          </a:solidFill>
-          <a:ln>
-            <a:noFill/>
-          </a:ln>
-        </p:spPr>
-        <p:style>
-          <a:lnRef idx="1">
-            <a:schemeClr val="accent1"/>
-          </a:lnRef>
-          <a:fillRef idx="3">
-            <a:schemeClr val="accent1"/>
-          </a:fillRef>
-          <a:effectRef idx="2">
-            <a:schemeClr val="accent1"/>
-          </a:effectRef>
-          <a:fontRef idx="minor">
-            <a:schemeClr val="lt1"/>
-          </a:fontRef>
-        </p:style>
-        <p:txBody>
-          <a:bodyPr rtlCol="0" anchor="ctr"/>
-          <a:lstStyle/>
-          <a:p>
-            <a:pPr algn="ctr"/>
-          </a:p>
-        </p:txBody>
-      </p:sp>
-      <p:sp>
-        <p:nvSpPr>
-          <p:cNvPr id="20" name="Rounded Rectangle 19"/>
-          <p:cNvSpPr/>
-          <p:nvPr/>
-        </p:nvSpPr>
-        <p:spPr>
-          <a:xfrm>
-            <a:off x="10168128" y="1874519"/>
-            <a:ext cx="1572768" cy="658368"/>
-          </a:xfrm>
-          <a:prstGeom prst="roundRect">
-            <a:avLst/>
-          </a:prstGeom>
-          <a:solidFill>
-            <a:srgbClr val="2F2F2F"/>
-          </a:solidFill>
-          <a:ln w="15240">
-            <a:solidFill>
-              <a:srgbClr val="2F2F2F"/>
-            </a:solidFill>
-          </a:ln>
-        </p:spPr>
-        <p:style>
-          <a:lnRef idx="1">
-            <a:schemeClr val="accent1"/>
-          </a:lnRef>
-          <a:fillRef idx="3">
-            <a:schemeClr val="accent1"/>
-          </a:fillRef>
-          <a:effectRef idx="2">
-            <a:schemeClr val="accent1"/>
-          </a:effectRef>
-          <a:fontRef idx="minor">
-            <a:schemeClr val="lt1"/>
-          </a:fontRef>
-        </p:style>
-        <p:txBody>
-          <a:bodyPr rtlCol="0" anchor="ctr" lIns="109728" rIns="109728"/>
-          <a:lstStyle/>
-          <a:p>
-            <a:pPr algn="ctr"/>
-            <a:r>
-              <a:rPr sz="1500" b="1">
-                <a:solidFill>
-                  <a:srgbClr val="FFFFFF"/>
-                </a:solidFill>
-                <a:latin typeface="Aptos"/>
-              </a:rPr>
-              <a:t>Download</a:t>
-            </a:r>
-          </a:p>
-        </p:txBody>
-      </p:sp>
-      <p:sp>
-        <p:nvSpPr>
-          <p:cNvPr id="21" name="TextBox 20"/>
-          <p:cNvSpPr txBox="1"/>
-          <p:nvPr/>
-        </p:nvSpPr>
-        <p:spPr>
-          <a:xfrm>
-            <a:off x="10168128" y="2670048"/>
-            <a:ext cx="1572768" cy="548640"/>
-          </a:xfrm>
-          <a:prstGeom prst="rect">
-            <a:avLst/>
-          </a:prstGeom>
-          <a:noFill/>
-        </p:spPr>
-        <p:txBody>
-          <a:bodyPr wrap="none" lIns="25400" rIns="25400" tIns="12700" bIns="12700" anchor="t">
-            <a:spAutoFit/>
-          </a:bodyPr>
-          <a:lstStyle/>
-          <a:p>
-            <a:pPr algn="ctr"/>
-            <a:r>
-              <a:rPr sz="1100" b="0">
-                <a:solidFill>
-                  <a:srgbClr val="252D36"/>
-                </a:solidFill>
-                <a:latin typeface="Aptos"/>
-              </a:rPr>
-              <a:t>Returns .xlsx to user</a:t>
-            </a:r>
-          </a:p>
-        </p:txBody>
-      </p:sp>
-      <p:sp>
-        <p:nvSpPr>
-          <p:cNvPr id="22" name="Rounded Rectangle 21"/>
-          <p:cNvSpPr/>
-          <p:nvPr/>
-        </p:nvSpPr>
-        <p:spPr>
-          <a:xfrm>
-            <a:off x="713232" y="4005072"/>
-            <a:ext cx="1143000" cy="384048"/>
-          </a:xfrm>
-          <a:prstGeom prst="roundRect">
-            <a:avLst/>
-          </a:prstGeom>
-          <a:solidFill>
-            <a:srgbClr val="DD3A05"/>
-          </a:solidFill>
-          <a:ln w="15240">
-            <a:solidFill>
-              <a:srgbClr val="DD3A05"/>
-            </a:solidFill>
-          </a:ln>
-        </p:spPr>
-        <p:style>
-          <a:lnRef idx="1">
-            <a:schemeClr val="accent1"/>
-          </a:lnRef>
-          <a:fillRef idx="3">
-            <a:schemeClr val="accent1"/>
-          </a:fillRef>
-          <a:effectRef idx="2">
-            <a:schemeClr val="accent1"/>
-          </a:effectRef>
-          <a:fontRef idx="minor">
-            <a:schemeClr val="lt1"/>
-          </a:fontRef>
-        </p:style>
-        <p:txBody>
-          <a:bodyPr rtlCol="0" anchor="ctr" lIns="109728" rIns="109728"/>
-          <a:lstStyle/>
-          <a:p>
-            <a:pPr algn="ctr"/>
-            <a:r>
-              <a:rPr sz="1100" b="1">
-                <a:solidFill>
-                  <a:srgbClr val="FFFFFF"/>
-                </a:solidFill>
-                <a:latin typeface="Aptos"/>
-              </a:rPr>
-              <a:t>Reuse</a:t>
-            </a:r>
-          </a:p>
-        </p:txBody>
-      </p:sp>
-      <p:sp>
-        <p:nvSpPr>
-          <p:cNvPr id="23" name="TextBox 22"/>
-          <p:cNvSpPr txBox="1"/>
-          <p:nvPr/>
-        </p:nvSpPr>
-        <p:spPr>
-          <a:xfrm>
-            <a:off x="2057400" y="4005072"/>
-            <a:ext cx="9144000" cy="384048"/>
-          </a:xfrm>
-          <a:prstGeom prst="rect">
-            <a:avLst/>
-          </a:prstGeom>
-          <a:noFill/>
-        </p:spPr>
-        <p:txBody>
-          <a:bodyPr wrap="none" lIns="25400" rIns="25400" tIns="12700" bIns="12700" anchor="t">
-            <a:spAutoFit/>
-          </a:bodyPr>
-          <a:lstStyle/>
-          <a:p>
-            <a:pPr algn="l"/>
-            <a:r>
-              <a:rPr sz="1500" b="0">
-                <a:solidFill>
-                  <a:srgbClr val="252D36"/>
-                </a:solidFill>
-                <a:latin typeface="Aptos"/>
-              </a:rPr>
-              <a:t>Database view • business calculations • Excel template • authentication • database connection</a:t>
-            </a:r>
-          </a:p>
-        </p:txBody>
-      </p:sp>
-      <p:sp>
-        <p:nvSpPr>
-          <p:cNvPr id="24" name="Rounded Rectangle 23"/>
-          <p:cNvSpPr/>
-          <p:nvPr/>
-        </p:nvSpPr>
-        <p:spPr>
-          <a:xfrm>
-            <a:off x="713232" y="4800600"/>
-            <a:ext cx="1143000" cy="384048"/>
-          </a:xfrm>
-          <a:prstGeom prst="roundRect">
-            <a:avLst/>
-          </a:prstGeom>
-          <a:solidFill>
-            <a:srgbClr val="FF8936"/>
-          </a:solidFill>
-          <a:ln w="15240">
-            <a:solidFill>
-              <a:srgbClr val="FF8936"/>
-            </a:solidFill>
-          </a:ln>
-        </p:spPr>
-        <p:style>
-          <a:lnRef idx="1">
-            <a:schemeClr val="accent1"/>
-          </a:lnRef>
-          <a:fillRef idx="3">
-            <a:schemeClr val="accent1"/>
-          </a:fillRef>
-          <a:effectRef idx="2">
-            <a:schemeClr val="accent1"/>
-          </a:effectRef>
-          <a:fontRef idx="minor">
-            <a:schemeClr val="lt1"/>
-          </a:fontRef>
-        </p:style>
-        <p:txBody>
-          <a:bodyPr rtlCol="0" anchor="ctr" lIns="109728" rIns="109728"/>
-          <a:lstStyle/>
-          <a:p>
-            <a:pPr algn="ctr"/>
-            <a:r>
-              <a:rPr sz="1100" b="1">
-                <a:solidFill>
-                  <a:srgbClr val="FFFFFF"/>
-                </a:solidFill>
-                <a:latin typeface="Aptos"/>
-              </a:rPr>
-              <a:t>Adapt</a:t>
-            </a:r>
-          </a:p>
-        </p:txBody>
-      </p:sp>
-      <p:sp>
-        <p:nvSpPr>
-          <p:cNvPr id="25" name="TextBox 24"/>
-          <p:cNvSpPr txBox="1"/>
-          <p:nvPr/>
-        </p:nvSpPr>
-        <p:spPr>
-          <a:xfrm>
-            <a:off x="2057400" y="4800600"/>
-            <a:ext cx="9144000" cy="384048"/>
-          </a:xfrm>
-          <a:prstGeom prst="rect">
-            <a:avLst/>
-          </a:prstGeom>
-          <a:noFill/>
-        </p:spPr>
-        <p:txBody>
-          <a:bodyPr wrap="none" lIns="25400" rIns="25400" tIns="12700" bIns="12700" anchor="t">
-            <a:spAutoFit/>
-          </a:bodyPr>
-          <a:lstStyle/>
-          <a:p>
-            <a:pPr algn="l"/>
-            <a:r>
-              <a:rPr sz="1500" b="0">
-                <a:solidFill>
-                  <a:srgbClr val="252D36"/>
-                </a:solidFill>
-                <a:latin typeface="Aptos"/>
-              </a:rPr>
-              <a:t>Databricks-specific code • file handling • API response • user feedback and error handling</a:t>
-            </a:r>
-          </a:p>
-        </p:txBody>
-      </p:sp>
-      <p:sp>
-        <p:nvSpPr>
-          <p:cNvPr id="26" name="Rounded Rectangle 25"/>
+              <a:t>User initiates the report • application queries one customer • workbook is delivered through the UI</a:t>
+            </a:r>
+          </a:p>
+        </p:txBody>
+      </p:sp>
+      <p:sp>
+        <p:nvSpPr>
+          <p:cNvPr id="28" name="Rounded Rectangle 27"/>
           <p:cNvSpPr/>
           <p:nvPr/>
         </p:nvSpPr>
@@ -10618,7 +10565,7 @@
       </p:sp>
       <p:sp>
         <p:nvSpPr>
-          <p:cNvPr id="27" name="TextBox 26"/>
+          <p:cNvPr id="29" name="TextBox 28"/>
           <p:cNvSpPr txBox="1"/>
           <p:nvPr/>
         </p:nvSpPr>
@@ -10653,7 +10600,7 @@
       </p:sp>
       <p:sp>
         <p:nvSpPr>
-          <p:cNvPr id="28" name="TextBox 27"/>
+          <p:cNvPr id="30" name="TextBox 29"/>
           <p:cNvSpPr txBox="1"/>
           <p:nvPr/>
         </p:nvSpPr>
